--- a/(6.23) 퀘스트의 조건(2) - 진행,완료,완료보상.pptx
+++ b/(6.23) 퀘스트의 조건(2) - 진행,완료,완료보상.pptx
@@ -14,23 +14,6 @@
     <p:sldId id="263" r:id="rId8"/>
     <p:sldId id="264" r:id="rId9"/>
     <p:sldId id="265" r:id="rId10"/>
-    <p:sldId id="282" r:id="rId11"/>
-    <p:sldId id="266" r:id="rId12"/>
-    <p:sldId id="267" r:id="rId13"/>
-    <p:sldId id="268" r:id="rId14"/>
-    <p:sldId id="269" r:id="rId15"/>
-    <p:sldId id="271" r:id="rId16"/>
-    <p:sldId id="270" r:id="rId17"/>
-    <p:sldId id="272" r:id="rId18"/>
-    <p:sldId id="273" r:id="rId19"/>
-    <p:sldId id="274" r:id="rId20"/>
-    <p:sldId id="275" r:id="rId21"/>
-    <p:sldId id="276" r:id="rId22"/>
-    <p:sldId id="277" r:id="rId23"/>
-    <p:sldId id="278" r:id="rId24"/>
-    <p:sldId id="279" r:id="rId25"/>
-    <p:sldId id="280" r:id="rId26"/>
-    <p:sldId id="281" r:id="rId27"/>
   </p:sldIdLst>
   <p:sldSz cx="12192000" cy="6858000"/>
   <p:notesSz cx="6858000" cy="9144000"/>
@@ -137,6 +120,139 @@
 </p:presentation>
 </file>
 
+<file path=ppt/changesInfos/changesInfo1.xml><?xml version="1.0" encoding="utf-8"?>
+<pc:chgInfo xmlns:a="http://schemas.openxmlformats.org/drawingml/2006/main" xmlns:r="http://schemas.openxmlformats.org/officeDocument/2006/relationships" xmlns:ac="http://schemas.microsoft.com/office/drawing/2013/main/command" xmlns:pc="http://schemas.microsoft.com/office/powerpoint/2013/main/command">
+  <pc:docChgLst>
+    <pc:chgData name="musukie52@gmail.com" userId="017bd91f96aa8751" providerId="LiveId" clId="{5B2C3894-F97E-4CAB-8812-5BB4D83AAC6A}"/>
+    <pc:docChg chg="delSld">
+      <pc:chgData name="musukie52@gmail.com" userId="017bd91f96aa8751" providerId="LiveId" clId="{5B2C3894-F97E-4CAB-8812-5BB4D83AAC6A}" dt="2026-06-25T02:22:33.469" v="0" actId="47"/>
+      <pc:docMkLst>
+        <pc:docMk/>
+      </pc:docMkLst>
+      <pc:sldChg chg="del">
+        <pc:chgData name="musukie52@gmail.com" userId="017bd91f96aa8751" providerId="LiveId" clId="{5B2C3894-F97E-4CAB-8812-5BB4D83AAC6A}" dt="2026-06-25T02:22:33.469" v="0" actId="47"/>
+        <pc:sldMkLst>
+          <pc:docMk/>
+          <pc:sldMk cId="884383630" sldId="266"/>
+        </pc:sldMkLst>
+      </pc:sldChg>
+      <pc:sldChg chg="del">
+        <pc:chgData name="musukie52@gmail.com" userId="017bd91f96aa8751" providerId="LiveId" clId="{5B2C3894-F97E-4CAB-8812-5BB4D83AAC6A}" dt="2026-06-25T02:22:33.469" v="0" actId="47"/>
+        <pc:sldMkLst>
+          <pc:docMk/>
+          <pc:sldMk cId="1800945867" sldId="267"/>
+        </pc:sldMkLst>
+      </pc:sldChg>
+      <pc:sldChg chg="del">
+        <pc:chgData name="musukie52@gmail.com" userId="017bd91f96aa8751" providerId="LiveId" clId="{5B2C3894-F97E-4CAB-8812-5BB4D83AAC6A}" dt="2026-06-25T02:22:33.469" v="0" actId="47"/>
+        <pc:sldMkLst>
+          <pc:docMk/>
+          <pc:sldMk cId="1644424924" sldId="268"/>
+        </pc:sldMkLst>
+      </pc:sldChg>
+      <pc:sldChg chg="del">
+        <pc:chgData name="musukie52@gmail.com" userId="017bd91f96aa8751" providerId="LiveId" clId="{5B2C3894-F97E-4CAB-8812-5BB4D83AAC6A}" dt="2026-06-25T02:22:33.469" v="0" actId="47"/>
+        <pc:sldMkLst>
+          <pc:docMk/>
+          <pc:sldMk cId="547219447" sldId="269"/>
+        </pc:sldMkLst>
+      </pc:sldChg>
+      <pc:sldChg chg="del">
+        <pc:chgData name="musukie52@gmail.com" userId="017bd91f96aa8751" providerId="LiveId" clId="{5B2C3894-F97E-4CAB-8812-5BB4D83AAC6A}" dt="2026-06-25T02:22:33.469" v="0" actId="47"/>
+        <pc:sldMkLst>
+          <pc:docMk/>
+          <pc:sldMk cId="1478378256" sldId="270"/>
+        </pc:sldMkLst>
+      </pc:sldChg>
+      <pc:sldChg chg="del">
+        <pc:chgData name="musukie52@gmail.com" userId="017bd91f96aa8751" providerId="LiveId" clId="{5B2C3894-F97E-4CAB-8812-5BB4D83AAC6A}" dt="2026-06-25T02:22:33.469" v="0" actId="47"/>
+        <pc:sldMkLst>
+          <pc:docMk/>
+          <pc:sldMk cId="3559322760" sldId="271"/>
+        </pc:sldMkLst>
+      </pc:sldChg>
+      <pc:sldChg chg="del">
+        <pc:chgData name="musukie52@gmail.com" userId="017bd91f96aa8751" providerId="LiveId" clId="{5B2C3894-F97E-4CAB-8812-5BB4D83AAC6A}" dt="2026-06-25T02:22:33.469" v="0" actId="47"/>
+        <pc:sldMkLst>
+          <pc:docMk/>
+          <pc:sldMk cId="2379909735" sldId="272"/>
+        </pc:sldMkLst>
+      </pc:sldChg>
+      <pc:sldChg chg="del">
+        <pc:chgData name="musukie52@gmail.com" userId="017bd91f96aa8751" providerId="LiveId" clId="{5B2C3894-F97E-4CAB-8812-5BB4D83AAC6A}" dt="2026-06-25T02:22:33.469" v="0" actId="47"/>
+        <pc:sldMkLst>
+          <pc:docMk/>
+          <pc:sldMk cId="255669306" sldId="273"/>
+        </pc:sldMkLst>
+      </pc:sldChg>
+      <pc:sldChg chg="del">
+        <pc:chgData name="musukie52@gmail.com" userId="017bd91f96aa8751" providerId="LiveId" clId="{5B2C3894-F97E-4CAB-8812-5BB4D83AAC6A}" dt="2026-06-25T02:22:33.469" v="0" actId="47"/>
+        <pc:sldMkLst>
+          <pc:docMk/>
+          <pc:sldMk cId="3085289281" sldId="274"/>
+        </pc:sldMkLst>
+      </pc:sldChg>
+      <pc:sldChg chg="del">
+        <pc:chgData name="musukie52@gmail.com" userId="017bd91f96aa8751" providerId="LiveId" clId="{5B2C3894-F97E-4CAB-8812-5BB4D83AAC6A}" dt="2026-06-25T02:22:33.469" v="0" actId="47"/>
+        <pc:sldMkLst>
+          <pc:docMk/>
+          <pc:sldMk cId="886887244" sldId="275"/>
+        </pc:sldMkLst>
+      </pc:sldChg>
+      <pc:sldChg chg="del">
+        <pc:chgData name="musukie52@gmail.com" userId="017bd91f96aa8751" providerId="LiveId" clId="{5B2C3894-F97E-4CAB-8812-5BB4D83AAC6A}" dt="2026-06-25T02:22:33.469" v="0" actId="47"/>
+        <pc:sldMkLst>
+          <pc:docMk/>
+          <pc:sldMk cId="2662050438" sldId="276"/>
+        </pc:sldMkLst>
+      </pc:sldChg>
+      <pc:sldChg chg="del">
+        <pc:chgData name="musukie52@gmail.com" userId="017bd91f96aa8751" providerId="LiveId" clId="{5B2C3894-F97E-4CAB-8812-5BB4D83AAC6A}" dt="2026-06-25T02:22:33.469" v="0" actId="47"/>
+        <pc:sldMkLst>
+          <pc:docMk/>
+          <pc:sldMk cId="2213736843" sldId="277"/>
+        </pc:sldMkLst>
+      </pc:sldChg>
+      <pc:sldChg chg="del">
+        <pc:chgData name="musukie52@gmail.com" userId="017bd91f96aa8751" providerId="LiveId" clId="{5B2C3894-F97E-4CAB-8812-5BB4D83AAC6A}" dt="2026-06-25T02:22:33.469" v="0" actId="47"/>
+        <pc:sldMkLst>
+          <pc:docMk/>
+          <pc:sldMk cId="1529535370" sldId="278"/>
+        </pc:sldMkLst>
+      </pc:sldChg>
+      <pc:sldChg chg="del">
+        <pc:chgData name="musukie52@gmail.com" userId="017bd91f96aa8751" providerId="LiveId" clId="{5B2C3894-F97E-4CAB-8812-5BB4D83AAC6A}" dt="2026-06-25T02:22:33.469" v="0" actId="47"/>
+        <pc:sldMkLst>
+          <pc:docMk/>
+          <pc:sldMk cId="250077212" sldId="279"/>
+        </pc:sldMkLst>
+      </pc:sldChg>
+      <pc:sldChg chg="del">
+        <pc:chgData name="musukie52@gmail.com" userId="017bd91f96aa8751" providerId="LiveId" clId="{5B2C3894-F97E-4CAB-8812-5BB4D83AAC6A}" dt="2026-06-25T02:22:33.469" v="0" actId="47"/>
+        <pc:sldMkLst>
+          <pc:docMk/>
+          <pc:sldMk cId="2025018391" sldId="280"/>
+        </pc:sldMkLst>
+      </pc:sldChg>
+      <pc:sldChg chg="del">
+        <pc:chgData name="musukie52@gmail.com" userId="017bd91f96aa8751" providerId="LiveId" clId="{5B2C3894-F97E-4CAB-8812-5BB4D83AAC6A}" dt="2026-06-25T02:22:33.469" v="0" actId="47"/>
+        <pc:sldMkLst>
+          <pc:docMk/>
+          <pc:sldMk cId="1217659274" sldId="281"/>
+        </pc:sldMkLst>
+      </pc:sldChg>
+      <pc:sldChg chg="del">
+        <pc:chgData name="musukie52@gmail.com" userId="017bd91f96aa8751" providerId="LiveId" clId="{5B2C3894-F97E-4CAB-8812-5BB4D83AAC6A}" dt="2026-06-25T02:22:33.469" v="0" actId="47"/>
+        <pc:sldMkLst>
+          <pc:docMk/>
+          <pc:sldMk cId="1560876923" sldId="282"/>
+        </pc:sldMkLst>
+      </pc:sldChg>
+    </pc:docChg>
+  </pc:docChgLst>
+</pc:chgInfo>
+</file>
+
 <file path=ppt/slideLayouts/slideLayout1.xml><?xml version="1.0" encoding="utf-8"?>
 <p:sldLayout xmlns:a="http://schemas.openxmlformats.org/drawingml/2006/main" xmlns:r="http://schemas.openxmlformats.org/officeDocument/2006/relationships" xmlns:p="http://schemas.openxmlformats.org/presentationml/2006/main" type="title" preserve="1">
   <p:cSld name="제목 슬라이드">
@@ -179,10 +295,9 @@
           </a:lstStyle>
           <a:p>
             <a:r>
-              <a:rPr lang="ko-KR" altLang="en-US" smtClean="0"/>
+              <a:rPr lang="ko-KR" altLang="en-US"/>
               <a:t>마스터 제목 스타일 편집</a:t>
             </a:r>
-            <a:endParaRPr lang="ko-KR" altLang="en-US"/>
           </a:p>
         </p:txBody>
       </p:sp>
@@ -244,10 +359,9 @@
           </a:lstStyle>
           <a:p>
             <a:r>
-              <a:rPr lang="ko-KR" altLang="en-US" smtClean="0"/>
+              <a:rPr lang="ko-KR" altLang="en-US"/>
               <a:t>클릭하여 마스터 부제목 스타일 편집</a:t>
             </a:r>
-            <a:endParaRPr lang="ko-KR" altLang="en-US"/>
           </a:p>
         </p:txBody>
       </p:sp>
@@ -268,7 +382,7 @@
           <a:p>
             <a:fld id="{2B628354-B743-43C3-B390-84B1DA6E2C4C}" type="datetimeFigureOut">
               <a:rPr lang="ko-KR" altLang="en-US" smtClean="0"/>
-              <a:t>2026-06-24</a:t>
+              <a:t>2026-06-25</a:t>
             </a:fld>
             <a:endParaRPr lang="ko-KR" altLang="en-US"/>
           </a:p>
@@ -362,10 +476,9 @@
           <a:lstStyle/>
           <a:p>
             <a:r>
-              <a:rPr lang="ko-KR" altLang="en-US" smtClean="0"/>
+              <a:rPr lang="ko-KR" altLang="en-US"/>
               <a:t>마스터 제목 스타일 편집</a:t>
             </a:r>
-            <a:endParaRPr lang="ko-KR" altLang="en-US"/>
           </a:p>
         </p:txBody>
       </p:sp>
@@ -386,38 +499,37 @@
           <a:p>
             <a:pPr lvl="0"/>
             <a:r>
-              <a:rPr lang="ko-KR" altLang="en-US" smtClean="0"/>
+              <a:rPr lang="ko-KR" altLang="en-US"/>
               <a:t>마스터 텍스트 스타일 편집</a:t>
             </a:r>
           </a:p>
           <a:p>
             <a:pPr lvl="1"/>
             <a:r>
-              <a:rPr lang="ko-KR" altLang="en-US" smtClean="0"/>
+              <a:rPr lang="ko-KR" altLang="en-US"/>
               <a:t>둘째 수준</a:t>
             </a:r>
           </a:p>
           <a:p>
             <a:pPr lvl="2"/>
             <a:r>
-              <a:rPr lang="ko-KR" altLang="en-US" smtClean="0"/>
+              <a:rPr lang="ko-KR" altLang="en-US"/>
               <a:t>셋째 수준</a:t>
             </a:r>
           </a:p>
           <a:p>
             <a:pPr lvl="3"/>
             <a:r>
-              <a:rPr lang="ko-KR" altLang="en-US" smtClean="0"/>
+              <a:rPr lang="ko-KR" altLang="en-US"/>
               <a:t>넷째 수준</a:t>
             </a:r>
           </a:p>
           <a:p>
             <a:pPr lvl="4"/>
             <a:r>
-              <a:rPr lang="ko-KR" altLang="en-US" smtClean="0"/>
+              <a:rPr lang="ko-KR" altLang="en-US"/>
               <a:t>다섯째 수준</a:t>
             </a:r>
-            <a:endParaRPr lang="ko-KR" altLang="en-US"/>
           </a:p>
         </p:txBody>
       </p:sp>
@@ -438,7 +550,7 @@
           <a:p>
             <a:fld id="{2B628354-B743-43C3-B390-84B1DA6E2C4C}" type="datetimeFigureOut">
               <a:rPr lang="ko-KR" altLang="en-US" smtClean="0"/>
-              <a:t>2026-06-24</a:t>
+              <a:t>2026-06-25</a:t>
             </a:fld>
             <a:endParaRPr lang="ko-KR" altLang="en-US"/>
           </a:p>
@@ -537,10 +649,9 @@
           <a:lstStyle/>
           <a:p>
             <a:r>
-              <a:rPr lang="ko-KR" altLang="en-US" smtClean="0"/>
+              <a:rPr lang="ko-KR" altLang="en-US"/>
               <a:t>마스터 제목 스타일 편집</a:t>
             </a:r>
-            <a:endParaRPr lang="ko-KR" altLang="en-US"/>
           </a:p>
         </p:txBody>
       </p:sp>
@@ -566,38 +677,37 @@
           <a:p>
             <a:pPr lvl="0"/>
             <a:r>
-              <a:rPr lang="ko-KR" altLang="en-US" smtClean="0"/>
+              <a:rPr lang="ko-KR" altLang="en-US"/>
               <a:t>마스터 텍스트 스타일 편집</a:t>
             </a:r>
           </a:p>
           <a:p>
             <a:pPr lvl="1"/>
             <a:r>
-              <a:rPr lang="ko-KR" altLang="en-US" smtClean="0"/>
+              <a:rPr lang="ko-KR" altLang="en-US"/>
               <a:t>둘째 수준</a:t>
             </a:r>
           </a:p>
           <a:p>
             <a:pPr lvl="2"/>
             <a:r>
-              <a:rPr lang="ko-KR" altLang="en-US" smtClean="0"/>
+              <a:rPr lang="ko-KR" altLang="en-US"/>
               <a:t>셋째 수준</a:t>
             </a:r>
           </a:p>
           <a:p>
             <a:pPr lvl="3"/>
             <a:r>
-              <a:rPr lang="ko-KR" altLang="en-US" smtClean="0"/>
+              <a:rPr lang="ko-KR" altLang="en-US"/>
               <a:t>넷째 수준</a:t>
             </a:r>
           </a:p>
           <a:p>
             <a:pPr lvl="4"/>
             <a:r>
-              <a:rPr lang="ko-KR" altLang="en-US" smtClean="0"/>
+              <a:rPr lang="ko-KR" altLang="en-US"/>
               <a:t>다섯째 수준</a:t>
             </a:r>
-            <a:endParaRPr lang="ko-KR" altLang="en-US"/>
           </a:p>
         </p:txBody>
       </p:sp>
@@ -618,7 +728,7 @@
           <a:p>
             <a:fld id="{2B628354-B743-43C3-B390-84B1DA6E2C4C}" type="datetimeFigureOut">
               <a:rPr lang="ko-KR" altLang="en-US" smtClean="0"/>
-              <a:t>2026-06-24</a:t>
+              <a:t>2026-06-25</a:t>
             </a:fld>
             <a:endParaRPr lang="ko-KR" altLang="en-US"/>
           </a:p>
@@ -712,10 +822,9 @@
           <a:lstStyle/>
           <a:p>
             <a:r>
-              <a:rPr lang="ko-KR" altLang="en-US" smtClean="0"/>
+              <a:rPr lang="ko-KR" altLang="en-US"/>
               <a:t>마스터 제목 스타일 편집</a:t>
             </a:r>
-            <a:endParaRPr lang="ko-KR" altLang="en-US"/>
           </a:p>
         </p:txBody>
       </p:sp>
@@ -736,38 +845,37 @@
           <a:p>
             <a:pPr lvl="0"/>
             <a:r>
-              <a:rPr lang="ko-KR" altLang="en-US" smtClean="0"/>
+              <a:rPr lang="ko-KR" altLang="en-US"/>
               <a:t>마스터 텍스트 스타일 편집</a:t>
             </a:r>
           </a:p>
           <a:p>
             <a:pPr lvl="1"/>
             <a:r>
-              <a:rPr lang="ko-KR" altLang="en-US" smtClean="0"/>
+              <a:rPr lang="ko-KR" altLang="en-US"/>
               <a:t>둘째 수준</a:t>
             </a:r>
           </a:p>
           <a:p>
             <a:pPr lvl="2"/>
             <a:r>
-              <a:rPr lang="ko-KR" altLang="en-US" smtClean="0"/>
+              <a:rPr lang="ko-KR" altLang="en-US"/>
               <a:t>셋째 수준</a:t>
             </a:r>
           </a:p>
           <a:p>
             <a:pPr lvl="3"/>
             <a:r>
-              <a:rPr lang="ko-KR" altLang="en-US" smtClean="0"/>
+              <a:rPr lang="ko-KR" altLang="en-US"/>
               <a:t>넷째 수준</a:t>
             </a:r>
           </a:p>
           <a:p>
             <a:pPr lvl="4"/>
             <a:r>
-              <a:rPr lang="ko-KR" altLang="en-US" smtClean="0"/>
+              <a:rPr lang="ko-KR" altLang="en-US"/>
               <a:t>다섯째 수준</a:t>
             </a:r>
-            <a:endParaRPr lang="ko-KR" altLang="en-US"/>
           </a:p>
         </p:txBody>
       </p:sp>
@@ -788,7 +896,7 @@
           <a:p>
             <a:fld id="{2B628354-B743-43C3-B390-84B1DA6E2C4C}" type="datetimeFigureOut">
               <a:rPr lang="ko-KR" altLang="en-US" smtClean="0"/>
-              <a:t>2026-06-24</a:t>
+              <a:t>2026-06-25</a:t>
             </a:fld>
             <a:endParaRPr lang="ko-KR" altLang="en-US"/>
           </a:p>
@@ -891,10 +999,9 @@
           </a:lstStyle>
           <a:p>
             <a:r>
-              <a:rPr lang="ko-KR" altLang="en-US" smtClean="0"/>
+              <a:rPr lang="ko-KR" altLang="en-US"/>
               <a:t>마스터 제목 스타일 편집</a:t>
             </a:r>
-            <a:endParaRPr lang="ko-KR" altLang="en-US"/>
           </a:p>
         </p:txBody>
       </p:sp>
@@ -1011,7 +1118,7 @@
           <a:p>
             <a:pPr lvl="0"/>
             <a:r>
-              <a:rPr lang="ko-KR" altLang="en-US" smtClean="0"/>
+              <a:rPr lang="ko-KR" altLang="en-US"/>
               <a:t>마스터 텍스트 스타일 편집</a:t>
             </a:r>
           </a:p>
@@ -1034,7 +1141,7 @@
           <a:p>
             <a:fld id="{2B628354-B743-43C3-B390-84B1DA6E2C4C}" type="datetimeFigureOut">
               <a:rPr lang="ko-KR" altLang="en-US" smtClean="0"/>
-              <a:t>2026-06-24</a:t>
+              <a:t>2026-06-25</a:t>
             </a:fld>
             <a:endParaRPr lang="ko-KR" altLang="en-US"/>
           </a:p>
@@ -1128,10 +1235,9 @@
           <a:lstStyle/>
           <a:p>
             <a:r>
-              <a:rPr lang="ko-KR" altLang="en-US" smtClean="0"/>
+              <a:rPr lang="ko-KR" altLang="en-US"/>
               <a:t>마스터 제목 스타일 편집</a:t>
             </a:r>
-            <a:endParaRPr lang="ko-KR" altLang="en-US"/>
           </a:p>
         </p:txBody>
       </p:sp>
@@ -1157,38 +1263,37 @@
           <a:p>
             <a:pPr lvl="0"/>
             <a:r>
-              <a:rPr lang="ko-KR" altLang="en-US" smtClean="0"/>
+              <a:rPr lang="ko-KR" altLang="en-US"/>
               <a:t>마스터 텍스트 스타일 편집</a:t>
             </a:r>
           </a:p>
           <a:p>
             <a:pPr lvl="1"/>
             <a:r>
-              <a:rPr lang="ko-KR" altLang="en-US" smtClean="0"/>
+              <a:rPr lang="ko-KR" altLang="en-US"/>
               <a:t>둘째 수준</a:t>
             </a:r>
           </a:p>
           <a:p>
             <a:pPr lvl="2"/>
             <a:r>
-              <a:rPr lang="ko-KR" altLang="en-US" smtClean="0"/>
+              <a:rPr lang="ko-KR" altLang="en-US"/>
               <a:t>셋째 수준</a:t>
             </a:r>
           </a:p>
           <a:p>
             <a:pPr lvl="3"/>
             <a:r>
-              <a:rPr lang="ko-KR" altLang="en-US" smtClean="0"/>
+              <a:rPr lang="ko-KR" altLang="en-US"/>
               <a:t>넷째 수준</a:t>
             </a:r>
           </a:p>
           <a:p>
             <a:pPr lvl="4"/>
             <a:r>
-              <a:rPr lang="ko-KR" altLang="en-US" smtClean="0"/>
+              <a:rPr lang="ko-KR" altLang="en-US"/>
               <a:t>다섯째 수준</a:t>
             </a:r>
-            <a:endParaRPr lang="ko-KR" altLang="en-US"/>
           </a:p>
         </p:txBody>
       </p:sp>
@@ -1214,38 +1319,37 @@
           <a:p>
             <a:pPr lvl="0"/>
             <a:r>
-              <a:rPr lang="ko-KR" altLang="en-US" smtClean="0"/>
+              <a:rPr lang="ko-KR" altLang="en-US"/>
               <a:t>마스터 텍스트 스타일 편집</a:t>
             </a:r>
           </a:p>
           <a:p>
             <a:pPr lvl="1"/>
             <a:r>
-              <a:rPr lang="ko-KR" altLang="en-US" smtClean="0"/>
+              <a:rPr lang="ko-KR" altLang="en-US"/>
               <a:t>둘째 수준</a:t>
             </a:r>
           </a:p>
           <a:p>
             <a:pPr lvl="2"/>
             <a:r>
-              <a:rPr lang="ko-KR" altLang="en-US" smtClean="0"/>
+              <a:rPr lang="ko-KR" altLang="en-US"/>
               <a:t>셋째 수준</a:t>
             </a:r>
           </a:p>
           <a:p>
             <a:pPr lvl="3"/>
             <a:r>
-              <a:rPr lang="ko-KR" altLang="en-US" smtClean="0"/>
+              <a:rPr lang="ko-KR" altLang="en-US"/>
               <a:t>넷째 수준</a:t>
             </a:r>
           </a:p>
           <a:p>
             <a:pPr lvl="4"/>
             <a:r>
-              <a:rPr lang="ko-KR" altLang="en-US" smtClean="0"/>
+              <a:rPr lang="ko-KR" altLang="en-US"/>
               <a:t>다섯째 수준</a:t>
             </a:r>
-            <a:endParaRPr lang="ko-KR" altLang="en-US"/>
           </a:p>
         </p:txBody>
       </p:sp>
@@ -1266,7 +1370,7 @@
           <a:p>
             <a:fld id="{2B628354-B743-43C3-B390-84B1DA6E2C4C}" type="datetimeFigureOut">
               <a:rPr lang="ko-KR" altLang="en-US" smtClean="0"/>
-              <a:t>2026-06-24</a:t>
+              <a:t>2026-06-25</a:t>
             </a:fld>
             <a:endParaRPr lang="ko-KR" altLang="en-US"/>
           </a:p>
@@ -1365,10 +1469,9 @@
           <a:lstStyle/>
           <a:p>
             <a:r>
-              <a:rPr lang="ko-KR" altLang="en-US" smtClean="0"/>
+              <a:rPr lang="ko-KR" altLang="en-US"/>
               <a:t>마스터 제목 스타일 편집</a:t>
             </a:r>
-            <a:endParaRPr lang="ko-KR" altLang="en-US"/>
           </a:p>
         </p:txBody>
       </p:sp>
@@ -1431,7 +1534,7 @@
           <a:p>
             <a:pPr lvl="0"/>
             <a:r>
-              <a:rPr lang="ko-KR" altLang="en-US" smtClean="0"/>
+              <a:rPr lang="ko-KR" altLang="en-US"/>
               <a:t>마스터 텍스트 스타일 편집</a:t>
             </a:r>
           </a:p>
@@ -1459,38 +1562,37 @@
           <a:p>
             <a:pPr lvl="0"/>
             <a:r>
-              <a:rPr lang="ko-KR" altLang="en-US" smtClean="0"/>
+              <a:rPr lang="ko-KR" altLang="en-US"/>
               <a:t>마스터 텍스트 스타일 편집</a:t>
             </a:r>
           </a:p>
           <a:p>
             <a:pPr lvl="1"/>
             <a:r>
-              <a:rPr lang="ko-KR" altLang="en-US" smtClean="0"/>
+              <a:rPr lang="ko-KR" altLang="en-US"/>
               <a:t>둘째 수준</a:t>
             </a:r>
           </a:p>
           <a:p>
             <a:pPr lvl="2"/>
             <a:r>
-              <a:rPr lang="ko-KR" altLang="en-US" smtClean="0"/>
+              <a:rPr lang="ko-KR" altLang="en-US"/>
               <a:t>셋째 수준</a:t>
             </a:r>
           </a:p>
           <a:p>
             <a:pPr lvl="3"/>
             <a:r>
-              <a:rPr lang="ko-KR" altLang="en-US" smtClean="0"/>
+              <a:rPr lang="ko-KR" altLang="en-US"/>
               <a:t>넷째 수준</a:t>
             </a:r>
           </a:p>
           <a:p>
             <a:pPr lvl="4"/>
             <a:r>
-              <a:rPr lang="ko-KR" altLang="en-US" smtClean="0"/>
+              <a:rPr lang="ko-KR" altLang="en-US"/>
               <a:t>다섯째 수준</a:t>
             </a:r>
-            <a:endParaRPr lang="ko-KR" altLang="en-US"/>
           </a:p>
         </p:txBody>
       </p:sp>
@@ -1553,7 +1655,7 @@
           <a:p>
             <a:pPr lvl="0"/>
             <a:r>
-              <a:rPr lang="ko-KR" altLang="en-US" smtClean="0"/>
+              <a:rPr lang="ko-KR" altLang="en-US"/>
               <a:t>마스터 텍스트 스타일 편집</a:t>
             </a:r>
           </a:p>
@@ -1581,38 +1683,37 @@
           <a:p>
             <a:pPr lvl="0"/>
             <a:r>
-              <a:rPr lang="ko-KR" altLang="en-US" smtClean="0"/>
+              <a:rPr lang="ko-KR" altLang="en-US"/>
               <a:t>마스터 텍스트 스타일 편집</a:t>
             </a:r>
           </a:p>
           <a:p>
             <a:pPr lvl="1"/>
             <a:r>
-              <a:rPr lang="ko-KR" altLang="en-US" smtClean="0"/>
+              <a:rPr lang="ko-KR" altLang="en-US"/>
               <a:t>둘째 수준</a:t>
             </a:r>
           </a:p>
           <a:p>
             <a:pPr lvl="2"/>
             <a:r>
-              <a:rPr lang="ko-KR" altLang="en-US" smtClean="0"/>
+              <a:rPr lang="ko-KR" altLang="en-US"/>
               <a:t>셋째 수준</a:t>
             </a:r>
           </a:p>
           <a:p>
             <a:pPr lvl="3"/>
             <a:r>
-              <a:rPr lang="ko-KR" altLang="en-US" smtClean="0"/>
+              <a:rPr lang="ko-KR" altLang="en-US"/>
               <a:t>넷째 수준</a:t>
             </a:r>
           </a:p>
           <a:p>
             <a:pPr lvl="4"/>
             <a:r>
-              <a:rPr lang="ko-KR" altLang="en-US" smtClean="0"/>
+              <a:rPr lang="ko-KR" altLang="en-US"/>
               <a:t>다섯째 수준</a:t>
             </a:r>
-            <a:endParaRPr lang="ko-KR" altLang="en-US"/>
           </a:p>
         </p:txBody>
       </p:sp>
@@ -1633,7 +1734,7 @@
           <a:p>
             <a:fld id="{2B628354-B743-43C3-B390-84B1DA6E2C4C}" type="datetimeFigureOut">
               <a:rPr lang="ko-KR" altLang="en-US" smtClean="0"/>
-              <a:t>2026-06-24</a:t>
+              <a:t>2026-06-25</a:t>
             </a:fld>
             <a:endParaRPr lang="ko-KR" altLang="en-US"/>
           </a:p>
@@ -1727,10 +1828,9 @@
           <a:lstStyle/>
           <a:p>
             <a:r>
-              <a:rPr lang="ko-KR" altLang="en-US" smtClean="0"/>
+              <a:rPr lang="ko-KR" altLang="en-US"/>
               <a:t>마스터 제목 스타일 편집</a:t>
             </a:r>
-            <a:endParaRPr lang="ko-KR" altLang="en-US"/>
           </a:p>
         </p:txBody>
       </p:sp>
@@ -1751,7 +1851,7 @@
           <a:p>
             <a:fld id="{2B628354-B743-43C3-B390-84B1DA6E2C4C}" type="datetimeFigureOut">
               <a:rPr lang="ko-KR" altLang="en-US" smtClean="0"/>
-              <a:t>2026-06-24</a:t>
+              <a:t>2026-06-25</a:t>
             </a:fld>
             <a:endParaRPr lang="ko-KR" altLang="en-US"/>
           </a:p>
@@ -1846,7 +1946,7 @@
           <a:p>
             <a:fld id="{2B628354-B743-43C3-B390-84B1DA6E2C4C}" type="datetimeFigureOut">
               <a:rPr lang="ko-KR" altLang="en-US" smtClean="0"/>
-              <a:t>2026-06-24</a:t>
+              <a:t>2026-06-25</a:t>
             </a:fld>
             <a:endParaRPr lang="ko-KR" altLang="en-US"/>
           </a:p>
@@ -1949,10 +2049,9 @@
           </a:lstStyle>
           <a:p>
             <a:r>
-              <a:rPr lang="ko-KR" altLang="en-US" smtClean="0"/>
+              <a:rPr lang="ko-KR" altLang="en-US"/>
               <a:t>마스터 제목 스타일 편집</a:t>
             </a:r>
-            <a:endParaRPr lang="ko-KR" altLang="en-US"/>
           </a:p>
         </p:txBody>
       </p:sp>
@@ -2006,38 +2105,37 @@
           <a:p>
             <a:pPr lvl="0"/>
             <a:r>
-              <a:rPr lang="ko-KR" altLang="en-US" smtClean="0"/>
+              <a:rPr lang="ko-KR" altLang="en-US"/>
               <a:t>마스터 텍스트 스타일 편집</a:t>
             </a:r>
           </a:p>
           <a:p>
             <a:pPr lvl="1"/>
             <a:r>
-              <a:rPr lang="ko-KR" altLang="en-US" smtClean="0"/>
+              <a:rPr lang="ko-KR" altLang="en-US"/>
               <a:t>둘째 수준</a:t>
             </a:r>
           </a:p>
           <a:p>
             <a:pPr lvl="2"/>
             <a:r>
-              <a:rPr lang="ko-KR" altLang="en-US" smtClean="0"/>
+              <a:rPr lang="ko-KR" altLang="en-US"/>
               <a:t>셋째 수준</a:t>
             </a:r>
           </a:p>
           <a:p>
             <a:pPr lvl="3"/>
             <a:r>
-              <a:rPr lang="ko-KR" altLang="en-US" smtClean="0"/>
+              <a:rPr lang="ko-KR" altLang="en-US"/>
               <a:t>넷째 수준</a:t>
             </a:r>
           </a:p>
           <a:p>
             <a:pPr lvl="4"/>
             <a:r>
-              <a:rPr lang="ko-KR" altLang="en-US" smtClean="0"/>
+              <a:rPr lang="ko-KR" altLang="en-US"/>
               <a:t>다섯째 수준</a:t>
             </a:r>
-            <a:endParaRPr lang="ko-KR" altLang="en-US"/>
           </a:p>
         </p:txBody>
       </p:sp>
@@ -2100,7 +2198,7 @@
           <a:p>
             <a:pPr lvl="0"/>
             <a:r>
-              <a:rPr lang="ko-KR" altLang="en-US" smtClean="0"/>
+              <a:rPr lang="ko-KR" altLang="en-US"/>
               <a:t>마스터 텍스트 스타일 편집</a:t>
             </a:r>
           </a:p>
@@ -2123,7 +2221,7 @@
           <a:p>
             <a:fld id="{2B628354-B743-43C3-B390-84B1DA6E2C4C}" type="datetimeFigureOut">
               <a:rPr lang="ko-KR" altLang="en-US" smtClean="0"/>
-              <a:t>2026-06-24</a:t>
+              <a:t>2026-06-25</a:t>
             </a:fld>
             <a:endParaRPr lang="ko-KR" altLang="en-US"/>
           </a:p>
@@ -2226,10 +2324,9 @@
           </a:lstStyle>
           <a:p>
             <a:r>
-              <a:rPr lang="ko-KR" altLang="en-US" smtClean="0"/>
+              <a:rPr lang="ko-KR" altLang="en-US"/>
               <a:t>마스터 제목 스타일 편집</a:t>
             </a:r>
-            <a:endParaRPr lang="ko-KR" altLang="en-US"/>
           </a:p>
         </p:txBody>
       </p:sp>
@@ -2353,7 +2450,7 @@
           <a:p>
             <a:pPr lvl="0"/>
             <a:r>
-              <a:rPr lang="ko-KR" altLang="en-US" smtClean="0"/>
+              <a:rPr lang="ko-KR" altLang="en-US"/>
               <a:t>마스터 텍스트 스타일 편집</a:t>
             </a:r>
           </a:p>
@@ -2376,7 +2473,7 @@
           <a:p>
             <a:fld id="{2B628354-B743-43C3-B390-84B1DA6E2C4C}" type="datetimeFigureOut">
               <a:rPr lang="ko-KR" altLang="en-US" smtClean="0"/>
-              <a:t>2026-06-24</a:t>
+              <a:t>2026-06-25</a:t>
             </a:fld>
             <a:endParaRPr lang="ko-KR" altLang="en-US"/>
           </a:p>
@@ -2485,10 +2582,9 @@
           <a:lstStyle/>
           <a:p>
             <a:r>
-              <a:rPr lang="ko-KR" altLang="en-US" smtClean="0"/>
+              <a:rPr lang="ko-KR" altLang="en-US"/>
               <a:t>마스터 제목 스타일 편집</a:t>
             </a:r>
-            <a:endParaRPr lang="ko-KR" altLang="en-US"/>
           </a:p>
         </p:txBody>
       </p:sp>
@@ -2519,38 +2615,37 @@
           <a:p>
             <a:pPr lvl="0"/>
             <a:r>
-              <a:rPr lang="ko-KR" altLang="en-US" smtClean="0"/>
+              <a:rPr lang="ko-KR" altLang="en-US"/>
               <a:t>마스터 텍스트 스타일 편집</a:t>
             </a:r>
           </a:p>
           <a:p>
             <a:pPr lvl="1"/>
             <a:r>
-              <a:rPr lang="ko-KR" altLang="en-US" smtClean="0"/>
+              <a:rPr lang="ko-KR" altLang="en-US"/>
               <a:t>둘째 수준</a:t>
             </a:r>
           </a:p>
           <a:p>
             <a:pPr lvl="2"/>
             <a:r>
-              <a:rPr lang="ko-KR" altLang="en-US" smtClean="0"/>
+              <a:rPr lang="ko-KR" altLang="en-US"/>
               <a:t>셋째 수준</a:t>
             </a:r>
           </a:p>
           <a:p>
             <a:pPr lvl="3"/>
             <a:r>
-              <a:rPr lang="ko-KR" altLang="en-US" smtClean="0"/>
+              <a:rPr lang="ko-KR" altLang="en-US"/>
               <a:t>넷째 수준</a:t>
             </a:r>
           </a:p>
           <a:p>
             <a:pPr lvl="4"/>
             <a:r>
-              <a:rPr lang="ko-KR" altLang="en-US" smtClean="0"/>
+              <a:rPr lang="ko-KR" altLang="en-US"/>
               <a:t>다섯째 수준</a:t>
             </a:r>
-            <a:endParaRPr lang="ko-KR" altLang="en-US"/>
           </a:p>
         </p:txBody>
       </p:sp>
@@ -2589,7 +2684,7 @@
           <a:p>
             <a:fld id="{2B628354-B743-43C3-B390-84B1DA6E2C4C}" type="datetimeFigureOut">
               <a:rPr lang="ko-KR" altLang="en-US" smtClean="0"/>
-              <a:t>2026-06-24</a:t>
+              <a:t>2026-06-25</a:t>
             </a:fld>
             <a:endParaRPr lang="ko-KR" altLang="en-US"/>
           </a:p>
@@ -3010,10 +3105,9 @@
           <a:lstStyle/>
           <a:p>
             <a:r>
-              <a:rPr lang="ko-KR" altLang="en-US" smtClean="0"/>
+              <a:rPr lang="ko-KR" altLang="en-US"/>
               <a:t>상호작용 구조물</a:t>
             </a:r>
-            <a:endParaRPr lang="ko-KR" altLang="en-US"/>
           </a:p>
         </p:txBody>
       </p:sp>
@@ -3038,178 +3132,172 @@
           <a:lstStyle/>
           <a:p>
             <a:r>
-              <a:rPr lang="ko-KR" altLang="en-US" smtClean="0"/>
+              <a:rPr lang="ko-KR" altLang="en-US"/>
               <a:t>트리거</a:t>
             </a:r>
             <a:r>
-              <a:rPr lang="en-US" altLang="ko-KR" smtClean="0"/>
+              <a:rPr lang="en-US" altLang="ko-KR"/>
               <a:t>1</a:t>
             </a:r>
             <a:r>
-              <a:rPr lang="ko-KR" altLang="en-US" smtClean="0"/>
+              <a:rPr lang="ko-KR" altLang="en-US"/>
               <a:t>과 트리거</a:t>
             </a:r>
             <a:r>
-              <a:rPr lang="en-US" altLang="ko-KR" smtClean="0"/>
+              <a:rPr lang="en-US" altLang="ko-KR"/>
               <a:t>2</a:t>
             </a:r>
+          </a:p>
+          <a:p>
+            <a:pPr lvl="1"/>
+            <a:r>
+              <a:rPr lang="ko-KR" altLang="en-US"/>
+              <a:t>각각의 트리거 상태 </a:t>
+            </a:r>
+            <a:r>
+              <a:rPr lang="en-US" altLang="ko-KR"/>
+              <a:t>(</a:t>
+            </a:r>
+            <a:r>
+              <a:rPr lang="ko-KR" altLang="en-US"/>
+              <a:t>예 </a:t>
+            </a:r>
+            <a:r>
+              <a:rPr lang="en-US" altLang="ko-KR"/>
+              <a:t>: on/off)</a:t>
+            </a:r>
+            <a:r>
+              <a:rPr lang="ko-KR" altLang="en-US"/>
+              <a:t>에 따라 </a:t>
+            </a:r>
+            <a:r>
+              <a:rPr lang="en-US" altLang="ko-KR"/>
+              <a:t>=&gt; </a:t>
+            </a:r>
+            <a:r>
+              <a:rPr lang="ko-KR" altLang="en-US"/>
+              <a:t>이것이 바로 퀘스트의 조건</a:t>
+            </a:r>
             <a:endParaRPr lang="en-US" altLang="ko-KR"/>
           </a:p>
           <a:p>
             <a:pPr lvl="1"/>
             <a:r>
-              <a:rPr lang="ko-KR" altLang="en-US" smtClean="0"/>
-              <a:t>각각의 트리거 상태 </a:t>
-            </a:r>
-            <a:r>
-              <a:rPr lang="en-US" altLang="ko-KR" smtClean="0"/>
-              <a:t>(</a:t>
-            </a:r>
-            <a:r>
-              <a:rPr lang="ko-KR" altLang="en-US" smtClean="0"/>
-              <a:t>예 </a:t>
-            </a:r>
-            <a:r>
-              <a:rPr lang="en-US" altLang="ko-KR" smtClean="0"/>
-              <a:t>: on/off)</a:t>
-            </a:r>
-            <a:r>
-              <a:rPr lang="ko-KR" altLang="en-US" smtClean="0"/>
-              <a:t>에 따라 </a:t>
-            </a:r>
-            <a:r>
-              <a:rPr lang="en-US" altLang="ko-KR" smtClean="0"/>
-              <a:t>=&gt; </a:t>
-            </a:r>
-            <a:r>
-              <a:rPr lang="ko-KR" altLang="en-US" smtClean="0"/>
-              <a:t>이것이 바로 퀘스트의 조건</a:t>
-            </a:r>
-            <a:endParaRPr lang="en-US" altLang="ko-KR" smtClean="0"/>
+              <a:rPr lang="ko-KR" altLang="en-US"/>
+              <a:t>예</a:t>
+            </a:r>
+            <a:r>
+              <a:rPr lang="en-US" altLang="ko-KR"/>
+              <a:t>) </a:t>
+            </a:r>
+            <a:r>
+              <a:rPr lang="ko-KR" altLang="en-US"/>
+              <a:t>트리거</a:t>
+            </a:r>
+            <a:r>
+              <a:rPr lang="en-US" altLang="ko-KR"/>
+              <a:t>1</a:t>
+            </a:r>
+            <a:r>
+              <a:rPr lang="ko-KR" altLang="en-US"/>
+              <a:t>이 </a:t>
+            </a:r>
+            <a:r>
+              <a:rPr lang="en-US" altLang="ko-KR"/>
+              <a:t>on</a:t>
+            </a:r>
+            <a:r>
+              <a:rPr lang="ko-KR" altLang="en-US"/>
+              <a:t>돼있는지 </a:t>
+            </a:r>
+            <a:r>
+              <a:rPr lang="en-US" altLang="ko-KR"/>
+              <a:t>– yes &gt; </a:t>
+            </a:r>
+            <a:r>
+              <a:rPr lang="ko-KR" altLang="en-US"/>
+              <a:t>트리거 </a:t>
+            </a:r>
+            <a:r>
+              <a:rPr lang="en-US" altLang="ko-KR"/>
+              <a:t>2</a:t>
+            </a:r>
+            <a:r>
+              <a:rPr lang="ko-KR" altLang="en-US"/>
+              <a:t>를 어떻게 해야 하는지</a:t>
+            </a:r>
+            <a:br>
+              <a:rPr lang="en-US" altLang="ko-KR"/>
+            </a:br>
+            <a:r>
+              <a:rPr lang="en-US" altLang="ko-KR"/>
+              <a:t>				       - no &gt; </a:t>
+            </a:r>
+            <a:r>
+              <a:rPr lang="ko-KR" altLang="en-US"/>
+              <a:t>트리거 </a:t>
+            </a:r>
+            <a:r>
+              <a:rPr lang="en-US" altLang="ko-KR"/>
+              <a:t>1</a:t>
+            </a:r>
+            <a:r>
+              <a:rPr lang="ko-KR" altLang="en-US"/>
+              <a:t>을 </a:t>
+            </a:r>
+            <a:r>
+              <a:rPr lang="en-US" altLang="ko-KR"/>
+              <a:t>on </a:t>
+            </a:r>
+            <a:r>
+              <a:rPr lang="ko-KR" altLang="en-US"/>
+              <a:t>해야 한다</a:t>
+            </a:r>
+            <a:r>
+              <a:rPr lang="en-US" altLang="ko-KR"/>
+              <a:t>.</a:t>
+            </a:r>
+          </a:p>
+          <a:p>
+            <a:r>
+              <a:rPr lang="ko-KR" altLang="en-US"/>
+              <a:t>모델링 디자이너들</a:t>
+            </a:r>
+            <a:endParaRPr lang="en-US" altLang="ko-KR"/>
           </a:p>
           <a:p>
             <a:pPr lvl="1"/>
             <a:r>
-              <a:rPr lang="ko-KR" altLang="en-US" smtClean="0"/>
-              <a:t>예</a:t>
-            </a:r>
-            <a:r>
-              <a:rPr lang="en-US" altLang="ko-KR" smtClean="0"/>
-              <a:t>) </a:t>
-            </a:r>
-            <a:r>
-              <a:rPr lang="ko-KR" altLang="en-US" smtClean="0"/>
-              <a:t>트리거</a:t>
-            </a:r>
-            <a:r>
-              <a:rPr lang="en-US" altLang="ko-KR" smtClean="0"/>
-              <a:t>1</a:t>
-            </a:r>
-            <a:r>
-              <a:rPr lang="ko-KR" altLang="en-US" smtClean="0"/>
-              <a:t>이 </a:t>
-            </a:r>
-            <a:r>
-              <a:rPr lang="en-US" altLang="ko-KR" smtClean="0"/>
-              <a:t>on</a:t>
-            </a:r>
-            <a:r>
-              <a:rPr lang="ko-KR" altLang="en-US" smtClean="0"/>
-              <a:t>돼있는지 </a:t>
-            </a:r>
-            <a:r>
-              <a:rPr lang="en-US" altLang="ko-KR" smtClean="0"/>
-              <a:t>– yes &gt; </a:t>
-            </a:r>
-            <a:r>
-              <a:rPr lang="ko-KR" altLang="en-US" smtClean="0"/>
-              <a:t>트리거 </a:t>
-            </a:r>
-            <a:r>
-              <a:rPr lang="en-US" altLang="ko-KR" smtClean="0"/>
-              <a:t>2</a:t>
-            </a:r>
-            <a:r>
-              <a:rPr lang="ko-KR" altLang="en-US" smtClean="0"/>
-              <a:t>를 어떻게 해야 하는지</a:t>
-            </a:r>
-            <a:r>
-              <a:rPr lang="en-US" altLang="ko-KR"/>
-              <a:t/>
-            </a:r>
-            <a:br>
-              <a:rPr lang="en-US" altLang="ko-KR"/>
-            </a:br>
-            <a:r>
-              <a:rPr lang="en-US" altLang="ko-KR" smtClean="0"/>
-              <a:t>				       - no &gt; </a:t>
-            </a:r>
-            <a:r>
-              <a:rPr lang="ko-KR" altLang="en-US" smtClean="0"/>
-              <a:t>트리거 </a:t>
-            </a:r>
-            <a:r>
-              <a:rPr lang="en-US" altLang="ko-KR" smtClean="0"/>
-              <a:t>1</a:t>
-            </a:r>
-            <a:r>
-              <a:rPr lang="ko-KR" altLang="en-US" smtClean="0"/>
-              <a:t>을 </a:t>
-            </a:r>
-            <a:r>
-              <a:rPr lang="en-US" altLang="ko-KR" smtClean="0"/>
-              <a:t>on </a:t>
-            </a:r>
-            <a:r>
-              <a:rPr lang="ko-KR" altLang="en-US" smtClean="0"/>
-              <a:t>해야 한다</a:t>
-            </a:r>
-            <a:r>
-              <a:rPr lang="en-US" altLang="ko-KR" smtClean="0"/>
+              <a:rPr lang="en-US" altLang="ko-KR"/>
+              <a:t>Before</a:t>
+            </a:r>
+            <a:r>
+              <a:rPr lang="ko-KR" altLang="en-US"/>
+              <a:t>와 </a:t>
+            </a:r>
+            <a:r>
+              <a:rPr lang="en-US" altLang="ko-KR"/>
+              <a:t>After</a:t>
+            </a:r>
+            <a:r>
+              <a:rPr lang="ko-KR" altLang="en-US"/>
+              <a:t>의 모델링을 각각 그려낸다</a:t>
+            </a:r>
+            <a:r>
+              <a:rPr lang="en-US" altLang="ko-KR"/>
               <a:t>.</a:t>
             </a:r>
           </a:p>
           <a:p>
-            <a:r>
-              <a:rPr lang="ko-KR" altLang="en-US" smtClean="0"/>
-              <a:t>모델링 디자이너들</a:t>
-            </a:r>
-            <a:endParaRPr lang="en-US" altLang="ko-KR" smtClean="0"/>
-          </a:p>
-          <a:p>
             <a:pPr lvl="1"/>
             <a:r>
-              <a:rPr lang="en-US" altLang="ko-KR" smtClean="0"/>
-              <a:t>Before</a:t>
-            </a:r>
-            <a:r>
-              <a:rPr lang="ko-KR" altLang="en-US" smtClean="0"/>
-              <a:t>와 </a:t>
-            </a:r>
-            <a:r>
-              <a:rPr lang="en-US" altLang="ko-KR" smtClean="0"/>
-              <a:t>After</a:t>
-            </a:r>
-            <a:r>
-              <a:rPr lang="ko-KR" altLang="en-US" smtClean="0"/>
-              <a:t>의 모델링을 각각 그려낸다</a:t>
-            </a:r>
-            <a:r>
-              <a:rPr lang="en-US" altLang="ko-KR" smtClean="0"/>
+              <a:rPr lang="ko-KR" altLang="en-US"/>
+              <a:t>동작하는 모델과 그냥 모델을 각각 그려준다</a:t>
+            </a:r>
+            <a:r>
+              <a:rPr lang="en-US" altLang="ko-KR"/>
               <a:t>.</a:t>
             </a:r>
-          </a:p>
-          <a:p>
-            <a:pPr lvl="1"/>
-            <a:r>
-              <a:rPr lang="ko-KR" altLang="en-US" smtClean="0"/>
-              <a:t>동작하는 모델과 그냥 모델을 각각 그려준다</a:t>
-            </a:r>
-            <a:r>
-              <a:rPr lang="en-US" altLang="ko-KR" smtClean="0"/>
-              <a:t>.</a:t>
-            </a:r>
-            <a:endParaRPr lang="en-US" altLang="ko-KR"/>
           </a:p>
           <a:p>
             <a:endParaRPr lang="ko-KR" altLang="en-US"/>
@@ -3220,1223 +3308,6 @@
     <p:extLst>
       <p:ext uri="{BB962C8B-B14F-4D97-AF65-F5344CB8AC3E}">
         <p14:creationId xmlns:p14="http://schemas.microsoft.com/office/powerpoint/2010/main" val="1865600531"/>
-      </p:ext>
-    </p:extLst>
-  </p:cSld>
-  <p:clrMapOvr>
-    <a:masterClrMapping/>
-  </p:clrMapOvr>
-</p:sld>
-</file>
-
-<file path=ppt/slides/slide10.xml><?xml version="1.0" encoding="utf-8"?>
-<p:sld xmlns:a="http://schemas.openxmlformats.org/drawingml/2006/main" xmlns:r="http://schemas.openxmlformats.org/officeDocument/2006/relationships" xmlns:p="http://schemas.openxmlformats.org/presentationml/2006/main">
-  <p:cSld>
-    <p:spTree>
-      <p:nvGrpSpPr>
-        <p:cNvPr id="1" name=""/>
-        <p:cNvGrpSpPr/>
-        <p:nvPr/>
-      </p:nvGrpSpPr>
-      <p:grpSpPr>
-        <a:xfrm>
-          <a:off x="0" y="0"/>
-          <a:ext cx="0" cy="0"/>
-          <a:chOff x="0" y="0"/>
-          <a:chExt cx="0" cy="0"/>
-        </a:xfrm>
-      </p:grpSpPr>
-      <p:sp>
-        <p:nvSpPr>
-          <p:cNvPr id="2" name="제목 1"/>
-          <p:cNvSpPr>
-            <a:spLocks noGrp="1"/>
-          </p:cNvSpPr>
-          <p:nvPr>
-            <p:ph type="title"/>
-          </p:nvPr>
-        </p:nvSpPr>
-        <p:spPr/>
-        <p:txBody>
-          <a:bodyPr/>
-          <a:lstStyle/>
-          <a:p>
-            <a:r>
-              <a:rPr lang="ko-KR" altLang="en-US" smtClean="0"/>
-              <a:t>복습 연습</a:t>
-            </a:r>
-            <a:endParaRPr lang="ko-KR" altLang="en-US"/>
-          </a:p>
-        </p:txBody>
-      </p:sp>
-      <p:sp>
-        <p:nvSpPr>
-          <p:cNvPr id="3" name="내용 개체 틀 2"/>
-          <p:cNvSpPr>
-            <a:spLocks noGrp="1"/>
-          </p:cNvSpPr>
-          <p:nvPr>
-            <p:ph idx="1"/>
-          </p:nvPr>
-        </p:nvSpPr>
-        <p:spPr/>
-        <p:txBody>
-          <a:bodyPr/>
-          <a:lstStyle/>
-          <a:p>
-            <a:endParaRPr lang="ko-KR" altLang="en-US"/>
-          </a:p>
-        </p:txBody>
-      </p:sp>
-    </p:spTree>
-    <p:extLst>
-      <p:ext uri="{BB962C8B-B14F-4D97-AF65-F5344CB8AC3E}">
-        <p14:creationId xmlns:p14="http://schemas.microsoft.com/office/powerpoint/2010/main" val="1560876923"/>
-      </p:ext>
-    </p:extLst>
-  </p:cSld>
-  <p:clrMapOvr>
-    <a:masterClrMapping/>
-  </p:clrMapOvr>
-</p:sld>
-</file>
-
-<file path=ppt/slides/slide11.xml><?xml version="1.0" encoding="utf-8"?>
-<p:sld xmlns:a="http://schemas.openxmlformats.org/drawingml/2006/main" xmlns:r="http://schemas.openxmlformats.org/officeDocument/2006/relationships" xmlns:p="http://schemas.openxmlformats.org/presentationml/2006/main">
-  <p:cSld>
-    <p:spTree>
-      <p:nvGrpSpPr>
-        <p:cNvPr id="1" name=""/>
-        <p:cNvGrpSpPr/>
-        <p:nvPr/>
-      </p:nvGrpSpPr>
-      <p:grpSpPr>
-        <a:xfrm>
-          <a:off x="0" y="0"/>
-          <a:ext cx="0" cy="0"/>
-          <a:chOff x="0" y="0"/>
-          <a:chExt cx="0" cy="0"/>
-        </a:xfrm>
-      </p:grpSpPr>
-      <p:sp>
-        <p:nvSpPr>
-          <p:cNvPr id="2" name="제목 1"/>
-          <p:cNvSpPr>
-            <a:spLocks noGrp="1"/>
-          </p:cNvSpPr>
-          <p:nvPr>
-            <p:ph type="title"/>
-          </p:nvPr>
-        </p:nvSpPr>
-        <p:spPr/>
-        <p:txBody>
-          <a:bodyPr/>
-          <a:lstStyle/>
-          <a:p>
-            <a:r>
-              <a:rPr lang="ko-KR" altLang="en-US" smtClean="0"/>
-              <a:t>퀘스트</a:t>
-            </a:r>
-            <a:endParaRPr lang="ko-KR" altLang="en-US"/>
-          </a:p>
-        </p:txBody>
-      </p:sp>
-      <p:sp>
-        <p:nvSpPr>
-          <p:cNvPr id="3" name="내용 개체 틀 2"/>
-          <p:cNvSpPr>
-            <a:spLocks noGrp="1"/>
-          </p:cNvSpPr>
-          <p:nvPr>
-            <p:ph idx="1"/>
-          </p:nvPr>
-        </p:nvSpPr>
-        <p:spPr/>
-        <p:txBody>
-          <a:bodyPr/>
-          <a:lstStyle/>
-          <a:p>
-            <a:r>
-              <a:rPr lang="ko-KR" altLang="en-US" smtClean="0"/>
-              <a:t>게임이 지닌 상황을 리드하고 리딩한다</a:t>
-            </a:r>
-            <a:r>
-              <a:rPr lang="en-US" altLang="ko-KR" smtClean="0"/>
-              <a:t>.</a:t>
-            </a:r>
-          </a:p>
-          <a:p>
-            <a:r>
-              <a:rPr lang="ko-KR" altLang="en-US" smtClean="0"/>
-              <a:t>상황 </a:t>
-            </a:r>
-            <a:r>
-              <a:rPr lang="en-US" altLang="ko-KR" smtClean="0"/>
-              <a:t>= </a:t>
-            </a:r>
-            <a:r>
-              <a:rPr lang="ko-KR" altLang="en-US" smtClean="0"/>
-              <a:t>등장인물 </a:t>
-            </a:r>
-            <a:r>
-              <a:rPr lang="en-US" altLang="ko-KR" smtClean="0"/>
-              <a:t>+ </a:t>
-            </a:r>
-            <a:r>
-              <a:rPr lang="ko-KR" altLang="en-US" smtClean="0"/>
-              <a:t>등장무대 </a:t>
-            </a:r>
-            <a:r>
-              <a:rPr lang="en-US" altLang="ko-KR" smtClean="0"/>
-              <a:t>+ </a:t>
-            </a:r>
-            <a:r>
-              <a:rPr lang="ko-KR" altLang="en-US" smtClean="0"/>
-              <a:t>대본</a:t>
-            </a:r>
-            <a:endParaRPr lang="en-US" altLang="ko-KR" smtClean="0"/>
-          </a:p>
-          <a:p>
-            <a:r>
-              <a:rPr lang="ko-KR" altLang="en-US" smtClean="0"/>
-              <a:t>조건이 중요</a:t>
-            </a:r>
-            <a:endParaRPr lang="en-US" altLang="ko-KR" smtClean="0"/>
-          </a:p>
-          <a:p>
-            <a:endParaRPr lang="en-US" altLang="ko-KR"/>
-          </a:p>
-          <a:p>
-            <a:r>
-              <a:rPr lang="ko-KR" altLang="en-US" smtClean="0"/>
-              <a:t>게임디자인 </a:t>
-            </a:r>
-            <a:r>
-              <a:rPr lang="en-US" altLang="ko-KR" smtClean="0"/>
-              <a:t>– </a:t>
-            </a:r>
-            <a:r>
-              <a:rPr lang="ko-KR" altLang="en-US" smtClean="0"/>
-              <a:t>게임튜토리얼</a:t>
-            </a:r>
-            <a:r>
-              <a:rPr lang="en-US" altLang="ko-KR" smtClean="0"/>
-              <a:t>/</a:t>
-            </a:r>
-            <a:r>
-              <a:rPr lang="ko-KR" altLang="en-US" smtClean="0"/>
-              <a:t>킬러콘텐츠</a:t>
-            </a:r>
-            <a:r>
-              <a:rPr lang="en-US" altLang="ko-KR" smtClean="0"/>
-              <a:t>/</a:t>
-            </a:r>
-            <a:r>
-              <a:rPr lang="ko-KR" altLang="en-US" smtClean="0"/>
-              <a:t>게임시스템</a:t>
-            </a:r>
-            <a:endParaRPr lang="en-US" altLang="ko-KR" smtClean="0"/>
-          </a:p>
-          <a:p>
-            <a:r>
-              <a:rPr lang="ko-KR" altLang="en-US" smtClean="0"/>
-              <a:t>연출</a:t>
-            </a:r>
-            <a:r>
-              <a:rPr lang="en-US" altLang="ko-KR"/>
-              <a:t> </a:t>
-            </a:r>
-            <a:r>
-              <a:rPr lang="en-US" altLang="ko-KR" smtClean="0"/>
-              <a:t>– </a:t>
-            </a:r>
-            <a:r>
-              <a:rPr lang="ko-KR" altLang="en-US" smtClean="0"/>
-              <a:t>프로젝트 규모와 구현 수준</a:t>
-            </a:r>
-            <a:r>
-              <a:rPr lang="en-US" altLang="ko-KR" smtClean="0"/>
-              <a:t>/Cinematic + narrative</a:t>
-            </a:r>
-            <a:endParaRPr lang="ko-KR" altLang="en-US"/>
-          </a:p>
-        </p:txBody>
-      </p:sp>
-    </p:spTree>
-    <p:extLst>
-      <p:ext uri="{BB962C8B-B14F-4D97-AF65-F5344CB8AC3E}">
-        <p14:creationId xmlns:p14="http://schemas.microsoft.com/office/powerpoint/2010/main" val="884383630"/>
-      </p:ext>
-    </p:extLst>
-  </p:cSld>
-  <p:clrMapOvr>
-    <a:masterClrMapping/>
-  </p:clrMapOvr>
-</p:sld>
-</file>
-
-<file path=ppt/slides/slide12.xml><?xml version="1.0" encoding="utf-8"?>
-<p:sld xmlns:a="http://schemas.openxmlformats.org/drawingml/2006/main" xmlns:r="http://schemas.openxmlformats.org/officeDocument/2006/relationships" xmlns:p="http://schemas.openxmlformats.org/presentationml/2006/main">
-  <p:cSld>
-    <p:spTree>
-      <p:nvGrpSpPr>
-        <p:cNvPr id="1" name=""/>
-        <p:cNvGrpSpPr/>
-        <p:nvPr/>
-      </p:nvGrpSpPr>
-      <p:grpSpPr>
-        <a:xfrm>
-          <a:off x="0" y="0"/>
-          <a:ext cx="0" cy="0"/>
-          <a:chOff x="0" y="0"/>
-          <a:chExt cx="0" cy="0"/>
-        </a:xfrm>
-      </p:grpSpPr>
-      <p:sp>
-        <p:nvSpPr>
-          <p:cNvPr id="2" name="제목 1"/>
-          <p:cNvSpPr>
-            <a:spLocks noGrp="1"/>
-          </p:cNvSpPr>
-          <p:nvPr>
-            <p:ph type="title"/>
-          </p:nvPr>
-        </p:nvSpPr>
-        <p:spPr/>
-        <p:txBody>
-          <a:bodyPr/>
-          <a:lstStyle/>
-          <a:p>
-            <a:r>
-              <a:rPr lang="ko-KR" altLang="en-US" smtClean="0"/>
-              <a:t>구성</a:t>
-            </a:r>
-            <a:endParaRPr lang="ko-KR" altLang="en-US"/>
-          </a:p>
-        </p:txBody>
-      </p:sp>
-      <p:sp>
-        <p:nvSpPr>
-          <p:cNvPr id="3" name="내용 개체 틀 2"/>
-          <p:cNvSpPr>
-            <a:spLocks noGrp="1"/>
-          </p:cNvSpPr>
-          <p:nvPr>
-            <p:ph idx="1"/>
-          </p:nvPr>
-        </p:nvSpPr>
-        <p:spPr/>
-        <p:txBody>
-          <a:bodyPr/>
-          <a:lstStyle/>
-          <a:p>
-            <a:r>
-              <a:rPr lang="ko-KR" altLang="en-US" smtClean="0"/>
-              <a:t>시나리오</a:t>
-            </a:r>
-            <a:endParaRPr lang="en-US" altLang="ko-KR" smtClean="0"/>
-          </a:p>
-          <a:p>
-            <a:r>
-              <a:rPr lang="ko-KR" altLang="en-US" smtClean="0"/>
-              <a:t>설정</a:t>
-            </a:r>
-            <a:endParaRPr lang="en-US" altLang="ko-KR" smtClean="0"/>
-          </a:p>
-          <a:p>
-            <a:r>
-              <a:rPr lang="ko-KR" altLang="en-US" smtClean="0"/>
-              <a:t>레벨</a:t>
-            </a:r>
-            <a:endParaRPr lang="en-US" altLang="ko-KR" smtClean="0"/>
-          </a:p>
-          <a:p>
-            <a:r>
-              <a:rPr lang="ko-KR" altLang="en-US" smtClean="0"/>
-              <a:t>콘텐츠</a:t>
-            </a:r>
-            <a:endParaRPr lang="en-US" altLang="ko-KR" smtClean="0"/>
-          </a:p>
-          <a:p>
-            <a:r>
-              <a:rPr lang="ko-KR" altLang="en-US" smtClean="0"/>
-              <a:t>밸런스</a:t>
-            </a:r>
-            <a:endParaRPr lang="en-US" altLang="ko-KR" smtClean="0"/>
-          </a:p>
-          <a:p>
-            <a:r>
-              <a:rPr lang="ko-KR" altLang="en-US" smtClean="0"/>
-              <a:t>시스템</a:t>
-            </a:r>
-            <a:endParaRPr lang="en-US" altLang="ko-KR" smtClean="0"/>
-          </a:p>
-          <a:p>
-            <a:r>
-              <a:rPr lang="ko-KR" altLang="en-US" smtClean="0"/>
-              <a:t>웃음</a:t>
-            </a:r>
-            <a:endParaRPr lang="en-US" altLang="ko-KR" smtClean="0"/>
-          </a:p>
-          <a:p>
-            <a:r>
-              <a:rPr lang="ko-KR" altLang="en-US" smtClean="0"/>
-              <a:t>이벤트</a:t>
-            </a:r>
-            <a:endParaRPr lang="ko-KR" altLang="en-US"/>
-          </a:p>
-        </p:txBody>
-      </p:sp>
-    </p:spTree>
-    <p:extLst>
-      <p:ext uri="{BB962C8B-B14F-4D97-AF65-F5344CB8AC3E}">
-        <p14:creationId xmlns:p14="http://schemas.microsoft.com/office/powerpoint/2010/main" val="1800945867"/>
-      </p:ext>
-    </p:extLst>
-  </p:cSld>
-  <p:clrMapOvr>
-    <a:masterClrMapping/>
-  </p:clrMapOvr>
-</p:sld>
-</file>
-
-<file path=ppt/slides/slide13.xml><?xml version="1.0" encoding="utf-8"?>
-<p:sld xmlns:a="http://schemas.openxmlformats.org/drawingml/2006/main" xmlns:r="http://schemas.openxmlformats.org/officeDocument/2006/relationships" xmlns:p="http://schemas.openxmlformats.org/presentationml/2006/main">
-  <p:cSld>
-    <p:spTree>
-      <p:nvGrpSpPr>
-        <p:cNvPr id="1" name=""/>
-        <p:cNvGrpSpPr/>
-        <p:nvPr/>
-      </p:nvGrpSpPr>
-      <p:grpSpPr>
-        <a:xfrm>
-          <a:off x="0" y="0"/>
-          <a:ext cx="0" cy="0"/>
-          <a:chOff x="0" y="0"/>
-          <a:chExt cx="0" cy="0"/>
-        </a:xfrm>
-      </p:grpSpPr>
-      <p:sp>
-        <p:nvSpPr>
-          <p:cNvPr id="2" name="제목 1"/>
-          <p:cNvSpPr>
-            <a:spLocks noGrp="1"/>
-          </p:cNvSpPr>
-          <p:nvPr>
-            <p:ph type="title"/>
-          </p:nvPr>
-        </p:nvSpPr>
-        <p:spPr/>
-        <p:txBody>
-          <a:bodyPr/>
-          <a:lstStyle/>
-          <a:p>
-            <a:r>
-              <a:rPr lang="ko-KR" altLang="en-US" smtClean="0"/>
-              <a:t>시나리오</a:t>
-            </a:r>
-            <a:endParaRPr lang="ko-KR" altLang="en-US"/>
-          </a:p>
-        </p:txBody>
-      </p:sp>
-      <p:sp>
-        <p:nvSpPr>
-          <p:cNvPr id="3" name="내용 개체 틀 2"/>
-          <p:cNvSpPr>
-            <a:spLocks noGrp="1"/>
-          </p:cNvSpPr>
-          <p:nvPr>
-            <p:ph idx="1"/>
-          </p:nvPr>
-        </p:nvSpPr>
-        <p:spPr/>
-        <p:txBody>
-          <a:bodyPr/>
-          <a:lstStyle/>
-          <a:p>
-            <a:r>
-              <a:rPr lang="ko-KR" altLang="en-US" smtClean="0"/>
-              <a:t>콘텐츠의 당위성을 부여하는 영역</a:t>
-            </a:r>
-            <a:endParaRPr lang="en-US" altLang="ko-KR" smtClean="0"/>
-          </a:p>
-          <a:p>
-            <a:endParaRPr lang="en-US" altLang="ko-KR"/>
-          </a:p>
-          <a:p>
-            <a:r>
-              <a:rPr lang="ko-KR" altLang="en-US" smtClean="0"/>
-              <a:t>보스 </a:t>
-            </a:r>
-            <a:r>
-              <a:rPr lang="en-US" altLang="ko-KR" smtClean="0"/>
-              <a:t>– </a:t>
-            </a:r>
-            <a:r>
-              <a:rPr lang="ko-KR" altLang="en-US" smtClean="0"/>
-              <a:t>과거</a:t>
-            </a:r>
-            <a:endParaRPr lang="en-US" altLang="ko-KR" smtClean="0"/>
-          </a:p>
-          <a:p>
-            <a:r>
-              <a:rPr lang="en-US" altLang="ko-KR" smtClean="0"/>
-              <a:t>NPC Hero – </a:t>
-            </a:r>
-            <a:r>
-              <a:rPr lang="ko-KR" altLang="en-US" smtClean="0"/>
-              <a:t>현재</a:t>
-            </a:r>
-            <a:endParaRPr lang="en-US" altLang="ko-KR" smtClean="0"/>
-          </a:p>
-          <a:p>
-            <a:r>
-              <a:rPr lang="en-US" altLang="ko-KR" smtClean="0"/>
-              <a:t>PC </a:t>
-            </a:r>
-            <a:r>
-              <a:rPr lang="ko-KR" altLang="en-US" smtClean="0"/>
-              <a:t>액션 </a:t>
-            </a:r>
-            <a:r>
-              <a:rPr lang="en-US" altLang="ko-KR" smtClean="0"/>
-              <a:t>- </a:t>
-            </a:r>
-            <a:r>
-              <a:rPr lang="ko-KR" altLang="en-US" smtClean="0"/>
-              <a:t>미래</a:t>
-            </a:r>
-            <a:endParaRPr lang="ko-KR" altLang="en-US"/>
-          </a:p>
-        </p:txBody>
-      </p:sp>
-    </p:spTree>
-    <p:extLst>
-      <p:ext uri="{BB962C8B-B14F-4D97-AF65-F5344CB8AC3E}">
-        <p14:creationId xmlns:p14="http://schemas.microsoft.com/office/powerpoint/2010/main" val="1644424924"/>
-      </p:ext>
-    </p:extLst>
-  </p:cSld>
-  <p:clrMapOvr>
-    <a:masterClrMapping/>
-  </p:clrMapOvr>
-</p:sld>
-</file>
-
-<file path=ppt/slides/slide14.xml><?xml version="1.0" encoding="utf-8"?>
-<p:sld xmlns:a="http://schemas.openxmlformats.org/drawingml/2006/main" xmlns:r="http://schemas.openxmlformats.org/officeDocument/2006/relationships" xmlns:p="http://schemas.openxmlformats.org/presentationml/2006/main">
-  <p:cSld>
-    <p:spTree>
-      <p:nvGrpSpPr>
-        <p:cNvPr id="1" name=""/>
-        <p:cNvGrpSpPr/>
-        <p:nvPr/>
-      </p:nvGrpSpPr>
-      <p:grpSpPr>
-        <a:xfrm>
-          <a:off x="0" y="0"/>
-          <a:ext cx="0" cy="0"/>
-          <a:chOff x="0" y="0"/>
-          <a:chExt cx="0" cy="0"/>
-        </a:xfrm>
-      </p:grpSpPr>
-      <p:sp>
-        <p:nvSpPr>
-          <p:cNvPr id="2" name="제목 1"/>
-          <p:cNvSpPr>
-            <a:spLocks noGrp="1"/>
-          </p:cNvSpPr>
-          <p:nvPr>
-            <p:ph type="title"/>
-          </p:nvPr>
-        </p:nvSpPr>
-        <p:spPr/>
-        <p:txBody>
-          <a:bodyPr/>
-          <a:lstStyle/>
-          <a:p>
-            <a:r>
-              <a:rPr lang="ko-KR" altLang="en-US" smtClean="0"/>
-              <a:t>설정</a:t>
-            </a:r>
-            <a:endParaRPr lang="ko-KR" altLang="en-US"/>
-          </a:p>
-        </p:txBody>
-      </p:sp>
-      <p:sp>
-        <p:nvSpPr>
-          <p:cNvPr id="3" name="내용 개체 틀 2"/>
-          <p:cNvSpPr>
-            <a:spLocks noGrp="1"/>
-          </p:cNvSpPr>
-          <p:nvPr>
-            <p:ph idx="1"/>
-          </p:nvPr>
-        </p:nvSpPr>
-        <p:spPr/>
-        <p:txBody>
-          <a:bodyPr/>
-          <a:lstStyle/>
-          <a:p>
-            <a:r>
-              <a:rPr lang="ko-KR" altLang="en-US" smtClean="0"/>
-              <a:t>선정의 이유</a:t>
-            </a:r>
-            <a:endParaRPr lang="en-US" altLang="ko-KR" smtClean="0"/>
-          </a:p>
-          <a:p>
-            <a:r>
-              <a:rPr lang="ko-KR" altLang="en-US" smtClean="0"/>
-              <a:t>배경에 독특한 설정이 있다면 퀘스트에 활용해야 한다</a:t>
-            </a:r>
-            <a:r>
-              <a:rPr lang="en-US" altLang="ko-KR" smtClean="0"/>
-              <a:t>.</a:t>
-            </a:r>
-          </a:p>
-          <a:p>
-            <a:endParaRPr lang="en-US" altLang="ko-KR"/>
-          </a:p>
-          <a:p>
-            <a:r>
-              <a:rPr lang="ko-KR" altLang="en-US" smtClean="0"/>
-              <a:t>맵의 특성</a:t>
-            </a:r>
-            <a:endParaRPr lang="en-US" altLang="ko-KR" smtClean="0"/>
-          </a:p>
-          <a:p>
-            <a:r>
-              <a:rPr lang="ko-KR" altLang="en-US" smtClean="0"/>
-              <a:t>몬스터의 특성</a:t>
-            </a:r>
-            <a:endParaRPr lang="en-US" altLang="ko-KR" smtClean="0"/>
-          </a:p>
-          <a:p>
-            <a:r>
-              <a:rPr lang="en-US" altLang="ko-KR" smtClean="0"/>
-              <a:t>NPC</a:t>
-            </a:r>
-            <a:r>
-              <a:rPr lang="ko-KR" altLang="en-US" smtClean="0"/>
-              <a:t>의 특성</a:t>
-            </a:r>
-            <a:endParaRPr lang="en-US" altLang="ko-KR" smtClean="0"/>
-          </a:p>
-          <a:p>
-            <a:r>
-              <a:rPr lang="ko-KR" altLang="en-US" smtClean="0"/>
-              <a:t>오브젝트의 특성</a:t>
-            </a:r>
-            <a:endParaRPr lang="ko-KR" altLang="en-US"/>
-          </a:p>
-        </p:txBody>
-      </p:sp>
-    </p:spTree>
-    <p:extLst>
-      <p:ext uri="{BB962C8B-B14F-4D97-AF65-F5344CB8AC3E}">
-        <p14:creationId xmlns:p14="http://schemas.microsoft.com/office/powerpoint/2010/main" val="547219447"/>
-      </p:ext>
-    </p:extLst>
-  </p:cSld>
-  <p:clrMapOvr>
-    <a:masterClrMapping/>
-  </p:clrMapOvr>
-</p:sld>
-</file>
-
-<file path=ppt/slides/slide15.xml><?xml version="1.0" encoding="utf-8"?>
-<p:sld xmlns:a="http://schemas.openxmlformats.org/drawingml/2006/main" xmlns:r="http://schemas.openxmlformats.org/officeDocument/2006/relationships" xmlns:p="http://schemas.openxmlformats.org/presentationml/2006/main">
-  <p:cSld>
-    <p:spTree>
-      <p:nvGrpSpPr>
-        <p:cNvPr id="1" name=""/>
-        <p:cNvGrpSpPr/>
-        <p:nvPr/>
-      </p:nvGrpSpPr>
-      <p:grpSpPr>
-        <a:xfrm>
-          <a:off x="0" y="0"/>
-          <a:ext cx="0" cy="0"/>
-          <a:chOff x="0" y="0"/>
-          <a:chExt cx="0" cy="0"/>
-        </a:xfrm>
-      </p:grpSpPr>
-      <p:sp>
-        <p:nvSpPr>
-          <p:cNvPr id="2" name="제목 1"/>
-          <p:cNvSpPr>
-            <a:spLocks noGrp="1"/>
-          </p:cNvSpPr>
-          <p:nvPr>
-            <p:ph type="title"/>
-          </p:nvPr>
-        </p:nvSpPr>
-        <p:spPr/>
-        <p:txBody>
-          <a:bodyPr/>
-          <a:lstStyle/>
-          <a:p>
-            <a:r>
-              <a:rPr lang="ko-KR" altLang="en-US" smtClean="0"/>
-              <a:t>레벨</a:t>
-            </a:r>
-            <a:endParaRPr lang="ko-KR" altLang="en-US"/>
-          </a:p>
-        </p:txBody>
-      </p:sp>
-      <p:sp>
-        <p:nvSpPr>
-          <p:cNvPr id="3" name="내용 개체 틀 2"/>
-          <p:cNvSpPr>
-            <a:spLocks noGrp="1"/>
-          </p:cNvSpPr>
-          <p:nvPr>
-            <p:ph idx="1"/>
-          </p:nvPr>
-        </p:nvSpPr>
-        <p:spPr/>
-        <p:txBody>
-          <a:bodyPr/>
-          <a:lstStyle/>
-          <a:p>
-            <a:r>
-              <a:rPr lang="ko-KR" altLang="en-US" smtClean="0"/>
-              <a:t>콘텐츠 제시의 순서</a:t>
-            </a:r>
-            <a:endParaRPr lang="en-US" altLang="ko-KR" smtClean="0"/>
-          </a:p>
-          <a:p>
-            <a:r>
-              <a:rPr lang="ko-KR" altLang="en-US" smtClean="0"/>
-              <a:t>레벨 소모를 리드해야 한다</a:t>
-            </a:r>
-            <a:r>
-              <a:rPr lang="en-US" altLang="ko-KR" smtClean="0"/>
-              <a:t>.</a:t>
-            </a:r>
-          </a:p>
-          <a:p>
-            <a:endParaRPr lang="en-US" altLang="ko-KR" smtClean="0"/>
-          </a:p>
-          <a:p>
-            <a:r>
-              <a:rPr lang="ko-KR" altLang="en-US" smtClean="0"/>
-              <a:t>스토리텔링</a:t>
-            </a:r>
-            <a:endParaRPr lang="en-US" altLang="ko-KR" smtClean="0"/>
-          </a:p>
-          <a:p>
-            <a:r>
-              <a:rPr lang="ko-KR" altLang="en-US" smtClean="0"/>
-              <a:t>맵</a:t>
-            </a:r>
-            <a:endParaRPr lang="en-US" altLang="ko-KR" smtClean="0"/>
-          </a:p>
-          <a:p>
-            <a:r>
-              <a:rPr lang="ko-KR" altLang="en-US" smtClean="0"/>
-              <a:t>몬스터</a:t>
-            </a:r>
-            <a:endParaRPr lang="en-US" altLang="ko-KR" smtClean="0"/>
-          </a:p>
-          <a:p>
-            <a:r>
-              <a:rPr lang="ko-KR" altLang="en-US" smtClean="0"/>
-              <a:t>아이템</a:t>
-            </a:r>
-            <a:endParaRPr lang="en-US" altLang="ko-KR" smtClean="0"/>
-          </a:p>
-          <a:p>
-            <a:r>
-              <a:rPr lang="ko-KR" altLang="en-US" smtClean="0"/>
-              <a:t>스킬 등등</a:t>
-            </a:r>
-            <a:endParaRPr lang="en-US" altLang="ko-KR"/>
-          </a:p>
-        </p:txBody>
-      </p:sp>
-    </p:spTree>
-    <p:extLst>
-      <p:ext uri="{BB962C8B-B14F-4D97-AF65-F5344CB8AC3E}">
-        <p14:creationId xmlns:p14="http://schemas.microsoft.com/office/powerpoint/2010/main" val="3559322760"/>
-      </p:ext>
-    </p:extLst>
-  </p:cSld>
-  <p:clrMapOvr>
-    <a:masterClrMapping/>
-  </p:clrMapOvr>
-</p:sld>
-</file>
-
-<file path=ppt/slides/slide16.xml><?xml version="1.0" encoding="utf-8"?>
-<p:sld xmlns:a="http://schemas.openxmlformats.org/drawingml/2006/main" xmlns:r="http://schemas.openxmlformats.org/officeDocument/2006/relationships" xmlns:p="http://schemas.openxmlformats.org/presentationml/2006/main">
-  <p:cSld>
-    <p:spTree>
-      <p:nvGrpSpPr>
-        <p:cNvPr id="1" name=""/>
-        <p:cNvGrpSpPr/>
-        <p:nvPr/>
-      </p:nvGrpSpPr>
-      <p:grpSpPr>
-        <a:xfrm>
-          <a:off x="0" y="0"/>
-          <a:ext cx="0" cy="0"/>
-          <a:chOff x="0" y="0"/>
-          <a:chExt cx="0" cy="0"/>
-        </a:xfrm>
-      </p:grpSpPr>
-      <p:sp>
-        <p:nvSpPr>
-          <p:cNvPr id="2" name="제목 1"/>
-          <p:cNvSpPr>
-            <a:spLocks noGrp="1"/>
-          </p:cNvSpPr>
-          <p:nvPr>
-            <p:ph type="title"/>
-          </p:nvPr>
-        </p:nvSpPr>
-        <p:spPr/>
-        <p:txBody>
-          <a:bodyPr/>
-          <a:lstStyle/>
-          <a:p>
-            <a:r>
-              <a:rPr lang="ko-KR" altLang="en-US" smtClean="0"/>
-              <a:t>콘텐츠</a:t>
-            </a:r>
-            <a:endParaRPr lang="ko-KR" altLang="en-US"/>
-          </a:p>
-        </p:txBody>
-      </p:sp>
-      <p:sp>
-        <p:nvSpPr>
-          <p:cNvPr id="3" name="내용 개체 틀 2"/>
-          <p:cNvSpPr>
-            <a:spLocks noGrp="1"/>
-          </p:cNvSpPr>
-          <p:nvPr>
-            <p:ph idx="1"/>
-          </p:nvPr>
-        </p:nvSpPr>
-        <p:spPr/>
-        <p:txBody>
-          <a:bodyPr/>
-          <a:lstStyle/>
-          <a:p>
-            <a:r>
-              <a:rPr lang="ko-KR" altLang="en-US" smtClean="0"/>
-              <a:t>킬러 콘텐츠 </a:t>
-            </a:r>
-            <a:r>
-              <a:rPr lang="en-US" altLang="ko-KR" smtClean="0"/>
-              <a:t>: </a:t>
-            </a:r>
-            <a:r>
-              <a:rPr lang="ko-KR" altLang="en-US" smtClean="0"/>
-              <a:t>유저가 게임을 떠나지 못하게 하는 우리 게임만의 재밌는 콘텐츠</a:t>
-            </a:r>
-            <a:endParaRPr lang="en-US" altLang="ko-KR" smtClean="0"/>
-          </a:p>
-          <a:p>
-            <a:r>
-              <a:rPr lang="ko-KR" altLang="en-US" smtClean="0"/>
-              <a:t>소모필요 콘텐츠 </a:t>
-            </a:r>
-            <a:r>
-              <a:rPr lang="en-US" altLang="ko-KR" smtClean="0"/>
-              <a:t>: </a:t>
-            </a:r>
-            <a:r>
-              <a:rPr lang="ko-KR" altLang="en-US" smtClean="0"/>
-              <a:t>성장에 필수인 콘텐츠</a:t>
-            </a:r>
-            <a:endParaRPr lang="en-US" altLang="ko-KR" smtClean="0"/>
-          </a:p>
-          <a:p>
-            <a:endParaRPr lang="en-US" altLang="ko-KR"/>
-          </a:p>
-          <a:p>
-            <a:r>
-              <a:rPr lang="ko-KR" altLang="en-US" smtClean="0"/>
-              <a:t>메인</a:t>
-            </a:r>
-            <a:r>
-              <a:rPr lang="en-US" altLang="ko-KR" smtClean="0"/>
-              <a:t>/</a:t>
-            </a:r>
-            <a:r>
-              <a:rPr lang="ko-KR" altLang="en-US" smtClean="0"/>
-              <a:t>서브 퀘스트</a:t>
-            </a:r>
-            <a:endParaRPr lang="en-US" altLang="ko-KR" smtClean="0"/>
-          </a:p>
-          <a:p>
-            <a:r>
-              <a:rPr lang="ko-KR" altLang="en-US" smtClean="0"/>
-              <a:t>둘은 내용이 독립적이어도 된다</a:t>
-            </a:r>
-            <a:r>
-              <a:rPr lang="en-US" altLang="ko-KR" smtClean="0"/>
-              <a:t>.</a:t>
-            </a:r>
-            <a:endParaRPr lang="ko-KR" altLang="en-US"/>
-          </a:p>
-        </p:txBody>
-      </p:sp>
-    </p:spTree>
-    <p:extLst>
-      <p:ext uri="{BB962C8B-B14F-4D97-AF65-F5344CB8AC3E}">
-        <p14:creationId xmlns:p14="http://schemas.microsoft.com/office/powerpoint/2010/main" val="1478378256"/>
-      </p:ext>
-    </p:extLst>
-  </p:cSld>
-  <p:clrMapOvr>
-    <a:masterClrMapping/>
-  </p:clrMapOvr>
-</p:sld>
-</file>
-
-<file path=ppt/slides/slide17.xml><?xml version="1.0" encoding="utf-8"?>
-<p:sld xmlns:a="http://schemas.openxmlformats.org/drawingml/2006/main" xmlns:r="http://schemas.openxmlformats.org/officeDocument/2006/relationships" xmlns:p="http://schemas.openxmlformats.org/presentationml/2006/main">
-  <p:cSld>
-    <p:spTree>
-      <p:nvGrpSpPr>
-        <p:cNvPr id="1" name=""/>
-        <p:cNvGrpSpPr/>
-        <p:nvPr/>
-      </p:nvGrpSpPr>
-      <p:grpSpPr>
-        <a:xfrm>
-          <a:off x="0" y="0"/>
-          <a:ext cx="0" cy="0"/>
-          <a:chOff x="0" y="0"/>
-          <a:chExt cx="0" cy="0"/>
-        </a:xfrm>
-      </p:grpSpPr>
-      <p:sp>
-        <p:nvSpPr>
-          <p:cNvPr id="2" name="제목 1"/>
-          <p:cNvSpPr>
-            <a:spLocks noGrp="1"/>
-          </p:cNvSpPr>
-          <p:nvPr>
-            <p:ph type="title"/>
-          </p:nvPr>
-        </p:nvSpPr>
-        <p:spPr/>
-        <p:txBody>
-          <a:bodyPr/>
-          <a:lstStyle/>
-          <a:p>
-            <a:r>
-              <a:rPr lang="ko-KR" altLang="en-US" smtClean="0"/>
-              <a:t>밸런스</a:t>
-            </a:r>
-            <a:endParaRPr lang="ko-KR" altLang="en-US"/>
-          </a:p>
-        </p:txBody>
-      </p:sp>
-      <p:sp>
-        <p:nvSpPr>
-          <p:cNvPr id="3" name="내용 개체 틀 2"/>
-          <p:cNvSpPr>
-            <a:spLocks noGrp="1"/>
-          </p:cNvSpPr>
-          <p:nvPr>
-            <p:ph idx="1"/>
-          </p:nvPr>
-        </p:nvSpPr>
-        <p:spPr/>
-        <p:txBody>
-          <a:bodyPr>
-            <a:normAutofit lnSpcReduction="10000"/>
-          </a:bodyPr>
-          <a:lstStyle/>
-          <a:p>
-            <a:r>
-              <a:rPr lang="ko-KR" altLang="en-US" smtClean="0"/>
-              <a:t>라이프 사이클 </a:t>
-            </a:r>
-            <a:r>
-              <a:rPr lang="en-US" altLang="ko-KR" smtClean="0"/>
-              <a:t>(</a:t>
-            </a:r>
-            <a:r>
-              <a:rPr lang="ko-KR" altLang="en-US" smtClean="0"/>
-              <a:t>생명 주기</a:t>
-            </a:r>
-            <a:r>
-              <a:rPr lang="en-US" altLang="ko-KR" smtClean="0"/>
-              <a:t>)</a:t>
-            </a:r>
-          </a:p>
-          <a:p>
-            <a:r>
-              <a:rPr lang="ko-KR" altLang="en-US" smtClean="0"/>
-              <a:t>재미있는 시간 </a:t>
-            </a:r>
-            <a:r>
-              <a:rPr lang="en-US" altLang="ko-KR" smtClean="0"/>
-              <a:t>+ </a:t>
-            </a:r>
-            <a:r>
-              <a:rPr lang="ko-KR" altLang="en-US" smtClean="0"/>
-              <a:t>소모 난이도</a:t>
-            </a:r>
-            <a:endParaRPr lang="en-US" altLang="ko-KR" smtClean="0"/>
-          </a:p>
-          <a:p>
-            <a:endParaRPr lang="en-US" altLang="ko-KR"/>
-          </a:p>
-          <a:p>
-            <a:r>
-              <a:rPr lang="ko-KR" altLang="en-US" smtClean="0"/>
-              <a:t>얼마 만큼의 시간 동안 어느 정도의 난이도로 할 지 정하는 영역</a:t>
-            </a:r>
-            <a:endParaRPr lang="en-US" altLang="ko-KR" smtClean="0"/>
-          </a:p>
-          <a:p>
-            <a:endParaRPr lang="en-US" altLang="ko-KR"/>
-          </a:p>
-          <a:p>
-            <a:r>
-              <a:rPr lang="ko-KR" altLang="en-US" smtClean="0"/>
-              <a:t>게임 머니 보상</a:t>
-            </a:r>
-            <a:endParaRPr lang="en-US" altLang="ko-KR" smtClean="0"/>
-          </a:p>
-          <a:p>
-            <a:r>
-              <a:rPr lang="ko-KR" altLang="en-US" smtClean="0"/>
-              <a:t>게임 경험치 보상</a:t>
-            </a:r>
-            <a:endParaRPr lang="en-US" altLang="ko-KR" smtClean="0"/>
-          </a:p>
-          <a:p>
-            <a:r>
-              <a:rPr lang="ko-KR" altLang="en-US" smtClean="0"/>
-              <a:t>필요 아이템 보상</a:t>
-            </a:r>
-            <a:endParaRPr lang="ko-KR" altLang="en-US"/>
-          </a:p>
-        </p:txBody>
-      </p:sp>
-    </p:spTree>
-    <p:extLst>
-      <p:ext uri="{BB962C8B-B14F-4D97-AF65-F5344CB8AC3E}">
-        <p14:creationId xmlns:p14="http://schemas.microsoft.com/office/powerpoint/2010/main" val="2379909735"/>
-      </p:ext>
-    </p:extLst>
-  </p:cSld>
-  <p:clrMapOvr>
-    <a:masterClrMapping/>
-  </p:clrMapOvr>
-</p:sld>
-</file>
-
-<file path=ppt/slides/slide18.xml><?xml version="1.0" encoding="utf-8"?>
-<p:sld xmlns:a="http://schemas.openxmlformats.org/drawingml/2006/main" xmlns:r="http://schemas.openxmlformats.org/officeDocument/2006/relationships" xmlns:p="http://schemas.openxmlformats.org/presentationml/2006/main">
-  <p:cSld>
-    <p:spTree>
-      <p:nvGrpSpPr>
-        <p:cNvPr id="1" name=""/>
-        <p:cNvGrpSpPr/>
-        <p:nvPr/>
-      </p:nvGrpSpPr>
-      <p:grpSpPr>
-        <a:xfrm>
-          <a:off x="0" y="0"/>
-          <a:ext cx="0" cy="0"/>
-          <a:chOff x="0" y="0"/>
-          <a:chExt cx="0" cy="0"/>
-        </a:xfrm>
-      </p:grpSpPr>
-      <p:sp>
-        <p:nvSpPr>
-          <p:cNvPr id="2" name="제목 1"/>
-          <p:cNvSpPr>
-            <a:spLocks noGrp="1"/>
-          </p:cNvSpPr>
-          <p:nvPr>
-            <p:ph type="title"/>
-          </p:nvPr>
-        </p:nvSpPr>
-        <p:spPr/>
-        <p:txBody>
-          <a:bodyPr/>
-          <a:lstStyle/>
-          <a:p>
-            <a:r>
-              <a:rPr lang="ko-KR" altLang="en-US" smtClean="0"/>
-              <a:t>시스템</a:t>
-            </a:r>
-            <a:endParaRPr lang="ko-KR" altLang="en-US"/>
-          </a:p>
-        </p:txBody>
-      </p:sp>
-      <p:sp>
-        <p:nvSpPr>
-          <p:cNvPr id="3" name="내용 개체 틀 2"/>
-          <p:cNvSpPr>
-            <a:spLocks noGrp="1"/>
-          </p:cNvSpPr>
-          <p:nvPr>
-            <p:ph idx="1"/>
-          </p:nvPr>
-        </p:nvSpPr>
-        <p:spPr/>
-        <p:txBody>
-          <a:bodyPr/>
-          <a:lstStyle/>
-          <a:p>
-            <a:r>
-              <a:rPr lang="ko-KR" altLang="en-US" smtClean="0"/>
-              <a:t>유기성 디자인</a:t>
-            </a:r>
-            <a:endParaRPr lang="en-US" altLang="ko-KR" smtClean="0"/>
-          </a:p>
-          <a:p>
-            <a:r>
-              <a:rPr lang="ko-KR" altLang="en-US" smtClean="0"/>
-              <a:t>시스템과 콘텐츠 간의 </a:t>
-            </a:r>
-            <a:r>
-              <a:rPr lang="en-US" altLang="ko-KR" smtClean="0"/>
-              <a:t>‘</a:t>
-            </a:r>
-            <a:r>
-              <a:rPr lang="ko-KR" altLang="en-US" smtClean="0"/>
-              <a:t>약속을 설계</a:t>
-            </a:r>
-            <a:r>
-              <a:rPr lang="en-US" altLang="ko-KR" smtClean="0"/>
-              <a:t>‘</a:t>
-            </a:r>
-          </a:p>
-          <a:p>
-            <a:endParaRPr lang="en-US" altLang="ko-KR"/>
-          </a:p>
-          <a:p>
-            <a:r>
-              <a:rPr lang="ko-KR" altLang="en-US" smtClean="0"/>
-              <a:t>세계 안에서 약속이 어떻게 이루어지는지</a:t>
-            </a:r>
-            <a:r>
-              <a:rPr lang="en-US" altLang="ko-KR" smtClean="0"/>
-              <a:t>.</a:t>
-            </a:r>
-          </a:p>
-          <a:p>
-            <a:endParaRPr lang="en-US" altLang="ko-KR"/>
-          </a:p>
-          <a:p>
-            <a:r>
-              <a:rPr lang="en-US" altLang="ko-KR" smtClean="0"/>
-              <a:t>[WOW] </a:t>
-            </a:r>
-            <a:r>
-              <a:rPr lang="ko-KR" altLang="en-US" smtClean="0"/>
-              <a:t>옷감 예시</a:t>
-            </a:r>
-            <a:endParaRPr lang="ko-KR" altLang="en-US"/>
-          </a:p>
-        </p:txBody>
-      </p:sp>
-    </p:spTree>
-    <p:extLst>
-      <p:ext uri="{BB962C8B-B14F-4D97-AF65-F5344CB8AC3E}">
-        <p14:creationId xmlns:p14="http://schemas.microsoft.com/office/powerpoint/2010/main" val="255669306"/>
-      </p:ext>
-    </p:extLst>
-  </p:cSld>
-  <p:clrMapOvr>
-    <a:masterClrMapping/>
-  </p:clrMapOvr>
-</p:sld>
-</file>
-
-<file path=ppt/slides/slide19.xml><?xml version="1.0" encoding="utf-8"?>
-<p:sld xmlns:a="http://schemas.openxmlformats.org/drawingml/2006/main" xmlns:r="http://schemas.openxmlformats.org/officeDocument/2006/relationships" xmlns:p="http://schemas.openxmlformats.org/presentationml/2006/main">
-  <p:cSld>
-    <p:spTree>
-      <p:nvGrpSpPr>
-        <p:cNvPr id="1" name=""/>
-        <p:cNvGrpSpPr/>
-        <p:nvPr/>
-      </p:nvGrpSpPr>
-      <p:grpSpPr>
-        <a:xfrm>
-          <a:off x="0" y="0"/>
-          <a:ext cx="0" cy="0"/>
-          <a:chOff x="0" y="0"/>
-          <a:chExt cx="0" cy="0"/>
-        </a:xfrm>
-      </p:grpSpPr>
-      <p:sp>
-        <p:nvSpPr>
-          <p:cNvPr id="2" name="제목 1"/>
-          <p:cNvSpPr>
-            <a:spLocks noGrp="1"/>
-          </p:cNvSpPr>
-          <p:nvPr>
-            <p:ph type="title"/>
-          </p:nvPr>
-        </p:nvSpPr>
-        <p:spPr/>
-        <p:txBody>
-          <a:bodyPr/>
-          <a:lstStyle/>
-          <a:p>
-            <a:r>
-              <a:rPr lang="ko-KR" altLang="en-US" smtClean="0"/>
-              <a:t>웃음</a:t>
-            </a:r>
-            <a:endParaRPr lang="ko-KR" altLang="en-US"/>
-          </a:p>
-        </p:txBody>
-      </p:sp>
-      <p:sp>
-        <p:nvSpPr>
-          <p:cNvPr id="3" name="내용 개체 틀 2"/>
-          <p:cNvSpPr>
-            <a:spLocks noGrp="1"/>
-          </p:cNvSpPr>
-          <p:nvPr>
-            <p:ph idx="1"/>
-          </p:nvPr>
-        </p:nvSpPr>
-        <p:spPr/>
-        <p:txBody>
-          <a:bodyPr/>
-          <a:lstStyle/>
-          <a:p>
-            <a:r>
-              <a:rPr lang="ko-KR" altLang="en-US" smtClean="0"/>
-              <a:t>개발자의 유희</a:t>
-            </a:r>
-            <a:endParaRPr lang="en-US" altLang="ko-KR" smtClean="0"/>
-          </a:p>
-          <a:p>
-            <a:r>
-              <a:rPr lang="ko-KR" altLang="en-US" smtClean="0"/>
-              <a:t>사회풍자</a:t>
-            </a:r>
-            <a:endParaRPr lang="en-US" altLang="ko-KR" smtClean="0"/>
-          </a:p>
-          <a:p>
-            <a:r>
-              <a:rPr lang="ko-KR" altLang="en-US" smtClean="0"/>
-              <a:t>오마쥬</a:t>
-            </a:r>
-            <a:endParaRPr lang="ko-KR" altLang="en-US"/>
-          </a:p>
-        </p:txBody>
-      </p:sp>
-    </p:spTree>
-    <p:extLst>
-      <p:ext uri="{BB962C8B-B14F-4D97-AF65-F5344CB8AC3E}">
-        <p14:creationId xmlns:p14="http://schemas.microsoft.com/office/powerpoint/2010/main" val="3085289281"/>
       </p:ext>
     </p:extLst>
   </p:cSld>
@@ -4479,10 +3350,9 @@
           <a:lstStyle/>
           <a:p>
             <a:r>
-              <a:rPr lang="ko-KR" altLang="en-US" smtClean="0"/>
+              <a:rPr lang="ko-KR" altLang="en-US"/>
               <a:t>어제까지 배운 내용들</a:t>
             </a:r>
-            <a:endParaRPr lang="ko-KR" altLang="en-US"/>
           </a:p>
         </p:txBody>
       </p:sp>
@@ -4507,11 +3377,11 @@
           <a:lstStyle/>
           <a:p>
             <a:r>
-              <a:rPr lang="ko-KR" altLang="en-US" smtClean="0"/>
+              <a:rPr lang="ko-KR" altLang="en-US"/>
               <a:t>발동 조건들의 세부 내용들까지 암기하자</a:t>
             </a:r>
             <a:r>
-              <a:rPr lang="en-US" altLang="ko-KR" smtClean="0"/>
+              <a:rPr lang="en-US" altLang="ko-KR"/>
               <a:t>.</a:t>
             </a:r>
             <a:endParaRPr lang="ko-KR" altLang="en-US"/>
@@ -4522,957 +3392,6 @@
     <p:extLst>
       <p:ext uri="{BB962C8B-B14F-4D97-AF65-F5344CB8AC3E}">
         <p14:creationId xmlns:p14="http://schemas.microsoft.com/office/powerpoint/2010/main" val="3717644177"/>
-      </p:ext>
-    </p:extLst>
-  </p:cSld>
-  <p:clrMapOvr>
-    <a:masterClrMapping/>
-  </p:clrMapOvr>
-</p:sld>
-</file>
-
-<file path=ppt/slides/slide20.xml><?xml version="1.0" encoding="utf-8"?>
-<p:sld xmlns:a="http://schemas.openxmlformats.org/drawingml/2006/main" xmlns:r="http://schemas.openxmlformats.org/officeDocument/2006/relationships" xmlns:p="http://schemas.openxmlformats.org/presentationml/2006/main">
-  <p:cSld>
-    <p:spTree>
-      <p:nvGrpSpPr>
-        <p:cNvPr id="1" name=""/>
-        <p:cNvGrpSpPr/>
-        <p:nvPr/>
-      </p:nvGrpSpPr>
-      <p:grpSpPr>
-        <a:xfrm>
-          <a:off x="0" y="0"/>
-          <a:ext cx="0" cy="0"/>
-          <a:chOff x="0" y="0"/>
-          <a:chExt cx="0" cy="0"/>
-        </a:xfrm>
-      </p:grpSpPr>
-      <p:sp>
-        <p:nvSpPr>
-          <p:cNvPr id="2" name="제목 1"/>
-          <p:cNvSpPr>
-            <a:spLocks noGrp="1"/>
-          </p:cNvSpPr>
-          <p:nvPr>
-            <p:ph type="title"/>
-          </p:nvPr>
-        </p:nvSpPr>
-        <p:spPr/>
-        <p:txBody>
-          <a:bodyPr/>
-          <a:lstStyle/>
-          <a:p>
-            <a:r>
-              <a:rPr lang="ko-KR" altLang="en-US" smtClean="0"/>
-              <a:t>이벤트</a:t>
-            </a:r>
-            <a:endParaRPr lang="ko-KR" altLang="en-US"/>
-          </a:p>
-        </p:txBody>
-      </p:sp>
-      <p:sp>
-        <p:nvSpPr>
-          <p:cNvPr id="3" name="내용 개체 틀 2"/>
-          <p:cNvSpPr>
-            <a:spLocks noGrp="1"/>
-          </p:cNvSpPr>
-          <p:nvPr>
-            <p:ph idx="1"/>
-          </p:nvPr>
-        </p:nvSpPr>
-        <p:spPr/>
-        <p:txBody>
-          <a:bodyPr/>
-          <a:lstStyle/>
-          <a:p>
-            <a:r>
-              <a:rPr lang="en-US" altLang="ko-KR" smtClean="0"/>
-              <a:t>CRM – </a:t>
-            </a:r>
-            <a:r>
-              <a:rPr lang="ko-KR" altLang="en-US" smtClean="0"/>
-              <a:t>고객 관계 형성 관리</a:t>
-            </a:r>
-            <a:endParaRPr lang="en-US" altLang="ko-KR" smtClean="0"/>
-          </a:p>
-          <a:p>
-            <a:endParaRPr lang="en-US" altLang="ko-KR"/>
-          </a:p>
-          <a:p>
-            <a:r>
-              <a:rPr lang="ko-KR" altLang="en-US" smtClean="0"/>
-              <a:t>국가별 로컬라이징</a:t>
-            </a:r>
-            <a:endParaRPr lang="en-US" altLang="ko-KR" smtClean="0"/>
-          </a:p>
-          <a:p>
-            <a:r>
-              <a:rPr lang="ko-KR" altLang="en-US" smtClean="0"/>
-              <a:t>국내 고객 유치</a:t>
-            </a:r>
-            <a:endParaRPr lang="en-US" altLang="ko-KR" smtClean="0"/>
-          </a:p>
-          <a:p>
-            <a:r>
-              <a:rPr lang="ko-KR" altLang="en-US" smtClean="0"/>
-              <a:t>시즌 부여</a:t>
-            </a:r>
-            <a:endParaRPr lang="en-US" altLang="ko-KR" smtClean="0"/>
-          </a:p>
-          <a:p>
-            <a:r>
-              <a:rPr lang="en-US" altLang="ko-KR" smtClean="0"/>
-              <a:t>BM</a:t>
-            </a:r>
-            <a:r>
-              <a:rPr lang="ko-KR" altLang="en-US" smtClean="0"/>
-              <a:t>용 이벤트</a:t>
-            </a:r>
-            <a:endParaRPr lang="en-US" altLang="ko-KR" smtClean="0"/>
-          </a:p>
-          <a:p>
-            <a:r>
-              <a:rPr lang="ko-KR" altLang="en-US" smtClean="0"/>
-              <a:t>출석 이벤트같은 타입화된 이벤트</a:t>
-            </a:r>
-            <a:endParaRPr lang="ko-KR" altLang="en-US"/>
-          </a:p>
-        </p:txBody>
-      </p:sp>
-    </p:spTree>
-    <p:extLst>
-      <p:ext uri="{BB962C8B-B14F-4D97-AF65-F5344CB8AC3E}">
-        <p14:creationId xmlns:p14="http://schemas.microsoft.com/office/powerpoint/2010/main" val="886887244"/>
-      </p:ext>
-    </p:extLst>
-  </p:cSld>
-  <p:clrMapOvr>
-    <a:masterClrMapping/>
-  </p:clrMapOvr>
-</p:sld>
-</file>
-
-<file path=ppt/slides/slide21.xml><?xml version="1.0" encoding="utf-8"?>
-<p:sld xmlns:a="http://schemas.openxmlformats.org/drawingml/2006/main" xmlns:r="http://schemas.openxmlformats.org/officeDocument/2006/relationships" xmlns:p="http://schemas.openxmlformats.org/presentationml/2006/main">
-  <p:cSld>
-    <p:spTree>
-      <p:nvGrpSpPr>
-        <p:cNvPr id="1" name=""/>
-        <p:cNvGrpSpPr/>
-        <p:nvPr/>
-      </p:nvGrpSpPr>
-      <p:grpSpPr>
-        <a:xfrm>
-          <a:off x="0" y="0"/>
-          <a:ext cx="0" cy="0"/>
-          <a:chOff x="0" y="0"/>
-          <a:chExt cx="0" cy="0"/>
-        </a:xfrm>
-      </p:grpSpPr>
-      <p:sp>
-        <p:nvSpPr>
-          <p:cNvPr id="2" name="제목 1"/>
-          <p:cNvSpPr>
-            <a:spLocks noGrp="1"/>
-          </p:cNvSpPr>
-          <p:nvPr>
-            <p:ph type="title"/>
-          </p:nvPr>
-        </p:nvSpPr>
-        <p:spPr/>
-        <p:txBody>
-          <a:bodyPr/>
-          <a:lstStyle/>
-          <a:p>
-            <a:r>
-              <a:rPr lang="ko-KR" altLang="en-US" smtClean="0"/>
-              <a:t>퀘스트의 조건</a:t>
-            </a:r>
-            <a:endParaRPr lang="ko-KR" altLang="en-US"/>
-          </a:p>
-        </p:txBody>
-      </p:sp>
-      <p:sp>
-        <p:nvSpPr>
-          <p:cNvPr id="3" name="내용 개체 틀 2"/>
-          <p:cNvSpPr>
-            <a:spLocks noGrp="1"/>
-          </p:cNvSpPr>
-          <p:nvPr>
-            <p:ph idx="1"/>
-          </p:nvPr>
-        </p:nvSpPr>
-        <p:spPr/>
-        <p:txBody>
-          <a:bodyPr/>
-          <a:lstStyle/>
-          <a:p>
-            <a:r>
-              <a:rPr lang="ko-KR" altLang="en-US" smtClean="0"/>
-              <a:t>부여</a:t>
-            </a:r>
-            <a:endParaRPr lang="en-US" altLang="ko-KR" smtClean="0"/>
-          </a:p>
-          <a:p>
-            <a:r>
-              <a:rPr lang="ko-KR" altLang="en-US" smtClean="0"/>
-              <a:t>발동</a:t>
-            </a:r>
-            <a:endParaRPr lang="en-US" altLang="ko-KR" smtClean="0"/>
-          </a:p>
-          <a:p>
-            <a:r>
-              <a:rPr lang="ko-KR" altLang="en-US" smtClean="0"/>
-              <a:t>진행</a:t>
-            </a:r>
-            <a:endParaRPr lang="en-US" altLang="ko-KR" smtClean="0"/>
-          </a:p>
-          <a:p>
-            <a:r>
-              <a:rPr lang="ko-KR" altLang="en-US" smtClean="0"/>
-              <a:t>완료</a:t>
-            </a:r>
-            <a:endParaRPr lang="en-US" altLang="ko-KR" smtClean="0"/>
-          </a:p>
-          <a:p>
-            <a:r>
-              <a:rPr lang="ko-KR" altLang="en-US" smtClean="0"/>
-              <a:t>완료보상</a:t>
-            </a:r>
-            <a:endParaRPr lang="en-US" altLang="ko-KR" smtClean="0"/>
-          </a:p>
-          <a:p>
-            <a:pPr marL="0" indent="0">
-              <a:buNone/>
-            </a:pPr>
-            <a:endParaRPr lang="ko-KR" altLang="en-US"/>
-          </a:p>
-        </p:txBody>
-      </p:sp>
-    </p:spTree>
-    <p:extLst>
-      <p:ext uri="{BB962C8B-B14F-4D97-AF65-F5344CB8AC3E}">
-        <p14:creationId xmlns:p14="http://schemas.microsoft.com/office/powerpoint/2010/main" val="2662050438"/>
-      </p:ext>
-    </p:extLst>
-  </p:cSld>
-  <p:clrMapOvr>
-    <a:masterClrMapping/>
-  </p:clrMapOvr>
-</p:sld>
-</file>
-
-<file path=ppt/slides/slide22.xml><?xml version="1.0" encoding="utf-8"?>
-<p:sld xmlns:a="http://schemas.openxmlformats.org/drawingml/2006/main" xmlns:r="http://schemas.openxmlformats.org/officeDocument/2006/relationships" xmlns:p="http://schemas.openxmlformats.org/presentationml/2006/main">
-  <p:cSld>
-    <p:spTree>
-      <p:nvGrpSpPr>
-        <p:cNvPr id="1" name=""/>
-        <p:cNvGrpSpPr/>
-        <p:nvPr/>
-      </p:nvGrpSpPr>
-      <p:grpSpPr>
-        <a:xfrm>
-          <a:off x="0" y="0"/>
-          <a:ext cx="0" cy="0"/>
-          <a:chOff x="0" y="0"/>
-          <a:chExt cx="0" cy="0"/>
-        </a:xfrm>
-      </p:grpSpPr>
-      <p:sp>
-        <p:nvSpPr>
-          <p:cNvPr id="2" name="제목 1"/>
-          <p:cNvSpPr>
-            <a:spLocks noGrp="1"/>
-          </p:cNvSpPr>
-          <p:nvPr>
-            <p:ph type="title"/>
-          </p:nvPr>
-        </p:nvSpPr>
-        <p:spPr/>
-        <p:txBody>
-          <a:bodyPr/>
-          <a:lstStyle/>
-          <a:p>
-            <a:r>
-              <a:rPr lang="ko-KR" altLang="en-US" smtClean="0"/>
-              <a:t>부여조건</a:t>
-            </a:r>
-            <a:endParaRPr lang="ko-KR" altLang="en-US"/>
-          </a:p>
-        </p:txBody>
-      </p:sp>
-      <p:sp>
-        <p:nvSpPr>
-          <p:cNvPr id="3" name="내용 개체 틀 2"/>
-          <p:cNvSpPr>
-            <a:spLocks noGrp="1"/>
-          </p:cNvSpPr>
-          <p:nvPr>
-            <p:ph idx="1"/>
-          </p:nvPr>
-        </p:nvSpPr>
-        <p:spPr/>
-        <p:txBody>
-          <a:bodyPr>
-            <a:normAutofit lnSpcReduction="10000"/>
-          </a:bodyPr>
-          <a:lstStyle/>
-          <a:p>
-            <a:r>
-              <a:rPr lang="ko-KR" altLang="en-US" smtClean="0"/>
-              <a:t>직업 </a:t>
-            </a:r>
-            <a:r>
-              <a:rPr lang="en-US" altLang="ko-KR" smtClean="0"/>
-              <a:t>– </a:t>
-            </a:r>
-            <a:r>
-              <a:rPr lang="ko-KR" altLang="en-US" smtClean="0"/>
-              <a:t>승급</a:t>
-            </a:r>
-            <a:r>
-              <a:rPr lang="en-US" altLang="ko-KR" smtClean="0"/>
-              <a:t>/</a:t>
-            </a:r>
-            <a:r>
-              <a:rPr lang="ko-KR" altLang="en-US" smtClean="0"/>
-              <a:t>전직</a:t>
-            </a:r>
-            <a:endParaRPr lang="en-US" altLang="ko-KR" smtClean="0"/>
-          </a:p>
-          <a:p>
-            <a:r>
-              <a:rPr lang="ko-KR" altLang="en-US" smtClean="0"/>
-              <a:t>레벨</a:t>
-            </a:r>
-            <a:endParaRPr lang="en-US" altLang="ko-KR" smtClean="0"/>
-          </a:p>
-          <a:p>
-            <a:r>
-              <a:rPr lang="ko-KR" altLang="en-US" smtClean="0"/>
-              <a:t>몬스터 킬 여부</a:t>
-            </a:r>
-            <a:endParaRPr lang="en-US" altLang="ko-KR" smtClean="0"/>
-          </a:p>
-          <a:p>
-            <a:r>
-              <a:rPr lang="ko-KR" altLang="en-US" smtClean="0"/>
-              <a:t>이전 퀘스트 달성 및 진행 상태</a:t>
-            </a:r>
-            <a:endParaRPr lang="en-US" altLang="ko-KR" smtClean="0"/>
-          </a:p>
-          <a:p>
-            <a:endParaRPr lang="en-US" altLang="ko-KR"/>
-          </a:p>
-          <a:p>
-            <a:r>
-              <a:rPr lang="ko-KR" altLang="en-US" smtClean="0"/>
-              <a:t>업적</a:t>
-            </a:r>
-            <a:r>
-              <a:rPr lang="en-US" altLang="ko-KR" smtClean="0"/>
-              <a:t>/</a:t>
-            </a:r>
-            <a:r>
-              <a:rPr lang="ko-KR" altLang="en-US" smtClean="0"/>
-              <a:t>칭호</a:t>
-            </a:r>
-            <a:endParaRPr lang="en-US" altLang="ko-KR" smtClean="0"/>
-          </a:p>
-          <a:p>
-            <a:r>
-              <a:rPr lang="ko-KR" altLang="en-US" smtClean="0"/>
-              <a:t>인벤토리 및 창고 아이템</a:t>
-            </a:r>
-            <a:endParaRPr lang="en-US" altLang="ko-KR" smtClean="0"/>
-          </a:p>
-          <a:p>
-            <a:r>
-              <a:rPr lang="ko-KR" altLang="en-US" smtClean="0"/>
-              <a:t>스킬 </a:t>
-            </a:r>
-            <a:r>
-              <a:rPr lang="en-US" altLang="ko-KR" smtClean="0"/>
-              <a:t>/ </a:t>
-            </a:r>
-            <a:r>
-              <a:rPr lang="ko-KR" altLang="en-US" smtClean="0"/>
-              <a:t>버프</a:t>
-            </a:r>
-            <a:r>
-              <a:rPr lang="en-US" altLang="ko-KR" smtClean="0"/>
-              <a:t>.</a:t>
-            </a:r>
-            <a:r>
-              <a:rPr lang="ko-KR" altLang="en-US" smtClean="0"/>
-              <a:t>디버프 습득</a:t>
-            </a:r>
-            <a:r>
-              <a:rPr lang="en-US" altLang="ko-KR" smtClean="0"/>
-              <a:t>.</a:t>
-            </a:r>
-            <a:r>
-              <a:rPr lang="ko-KR" altLang="en-US" smtClean="0"/>
-              <a:t>사용 상태</a:t>
-            </a:r>
-            <a:endParaRPr lang="en-US" altLang="ko-KR" smtClean="0"/>
-          </a:p>
-          <a:p>
-            <a:r>
-              <a:rPr lang="ko-KR" altLang="en-US" smtClean="0"/>
-              <a:t>위치 정보</a:t>
-            </a:r>
-            <a:endParaRPr lang="ko-KR" altLang="en-US"/>
-          </a:p>
-        </p:txBody>
-      </p:sp>
-    </p:spTree>
-    <p:extLst>
-      <p:ext uri="{BB962C8B-B14F-4D97-AF65-F5344CB8AC3E}">
-        <p14:creationId xmlns:p14="http://schemas.microsoft.com/office/powerpoint/2010/main" val="2213736843"/>
-      </p:ext>
-    </p:extLst>
-  </p:cSld>
-  <p:clrMapOvr>
-    <a:masterClrMapping/>
-  </p:clrMapOvr>
-</p:sld>
-</file>
-
-<file path=ppt/slides/slide23.xml><?xml version="1.0" encoding="utf-8"?>
-<p:sld xmlns:a="http://schemas.openxmlformats.org/drawingml/2006/main" xmlns:r="http://schemas.openxmlformats.org/officeDocument/2006/relationships" xmlns:p="http://schemas.openxmlformats.org/presentationml/2006/main">
-  <p:cSld>
-    <p:spTree>
-      <p:nvGrpSpPr>
-        <p:cNvPr id="1" name=""/>
-        <p:cNvGrpSpPr/>
-        <p:nvPr/>
-      </p:nvGrpSpPr>
-      <p:grpSpPr>
-        <a:xfrm>
-          <a:off x="0" y="0"/>
-          <a:ext cx="0" cy="0"/>
-          <a:chOff x="0" y="0"/>
-          <a:chExt cx="0" cy="0"/>
-        </a:xfrm>
-      </p:grpSpPr>
-      <p:sp>
-        <p:nvSpPr>
-          <p:cNvPr id="2" name="제목 1"/>
-          <p:cNvSpPr>
-            <a:spLocks noGrp="1"/>
-          </p:cNvSpPr>
-          <p:nvPr>
-            <p:ph type="title"/>
-          </p:nvPr>
-        </p:nvSpPr>
-        <p:spPr/>
-        <p:txBody>
-          <a:bodyPr/>
-          <a:lstStyle/>
-          <a:p>
-            <a:r>
-              <a:rPr lang="ko-KR" altLang="en-US" smtClean="0"/>
-              <a:t>발동 조건</a:t>
-            </a:r>
-            <a:endParaRPr lang="ko-KR" altLang="en-US"/>
-          </a:p>
-        </p:txBody>
-      </p:sp>
-      <p:sp>
-        <p:nvSpPr>
-          <p:cNvPr id="3" name="내용 개체 틀 2"/>
-          <p:cNvSpPr>
-            <a:spLocks noGrp="1"/>
-          </p:cNvSpPr>
-          <p:nvPr>
-            <p:ph idx="1"/>
-          </p:nvPr>
-        </p:nvSpPr>
-        <p:spPr/>
-        <p:txBody>
-          <a:bodyPr/>
-          <a:lstStyle/>
-          <a:p>
-            <a:r>
-              <a:rPr lang="en-US" altLang="ko-KR" smtClean="0"/>
-              <a:t>NPC </a:t>
-            </a:r>
-            <a:r>
-              <a:rPr lang="ko-KR" altLang="en-US" smtClean="0"/>
-              <a:t>대화</a:t>
-            </a:r>
-            <a:endParaRPr lang="en-US" altLang="ko-KR" smtClean="0"/>
-          </a:p>
-          <a:p>
-            <a:r>
-              <a:rPr lang="ko-KR" altLang="en-US" smtClean="0"/>
-              <a:t>우편물 시스템</a:t>
-            </a:r>
-            <a:endParaRPr lang="en-US" altLang="ko-KR" smtClean="0"/>
-          </a:p>
-          <a:p>
-            <a:r>
-              <a:rPr lang="en-US" altLang="ko-KR" smtClean="0"/>
-              <a:t>UI Event</a:t>
-            </a:r>
-          </a:p>
-          <a:p>
-            <a:r>
-              <a:rPr lang="en-US" altLang="ko-KR" smtClean="0"/>
-              <a:t>Event Dummy</a:t>
-            </a:r>
-          </a:p>
-          <a:p>
-            <a:r>
-              <a:rPr lang="en-US" altLang="ko-KR" smtClean="0"/>
-              <a:t>AI</a:t>
-            </a:r>
-          </a:p>
-          <a:p>
-            <a:r>
-              <a:rPr lang="en-US" altLang="ko-KR" smtClean="0"/>
-              <a:t>TIME</a:t>
-            </a:r>
-          </a:p>
-          <a:p>
-            <a:r>
-              <a:rPr lang="ko-KR" altLang="en-US" smtClean="0"/>
-              <a:t>아이템</a:t>
-            </a:r>
-            <a:r>
-              <a:rPr lang="en-US" altLang="ko-KR" smtClean="0"/>
-              <a:t>/</a:t>
-            </a:r>
-            <a:r>
-              <a:rPr lang="ko-KR" altLang="en-US" smtClean="0"/>
-              <a:t>스킬</a:t>
-            </a:r>
-            <a:endParaRPr lang="ko-KR" altLang="en-US"/>
-          </a:p>
-        </p:txBody>
-      </p:sp>
-    </p:spTree>
-    <p:extLst>
-      <p:ext uri="{BB962C8B-B14F-4D97-AF65-F5344CB8AC3E}">
-        <p14:creationId xmlns:p14="http://schemas.microsoft.com/office/powerpoint/2010/main" val="1529535370"/>
-      </p:ext>
-    </p:extLst>
-  </p:cSld>
-  <p:clrMapOvr>
-    <a:masterClrMapping/>
-  </p:clrMapOvr>
-</p:sld>
-</file>
-
-<file path=ppt/slides/slide24.xml><?xml version="1.0" encoding="utf-8"?>
-<p:sld xmlns:a="http://schemas.openxmlformats.org/drawingml/2006/main" xmlns:r="http://schemas.openxmlformats.org/officeDocument/2006/relationships" xmlns:p="http://schemas.openxmlformats.org/presentationml/2006/main">
-  <p:cSld>
-    <p:spTree>
-      <p:nvGrpSpPr>
-        <p:cNvPr id="1" name=""/>
-        <p:cNvGrpSpPr/>
-        <p:nvPr/>
-      </p:nvGrpSpPr>
-      <p:grpSpPr>
-        <a:xfrm>
-          <a:off x="0" y="0"/>
-          <a:ext cx="0" cy="0"/>
-          <a:chOff x="0" y="0"/>
-          <a:chExt cx="0" cy="0"/>
-        </a:xfrm>
-      </p:grpSpPr>
-      <p:sp>
-        <p:nvSpPr>
-          <p:cNvPr id="2" name="제목 1"/>
-          <p:cNvSpPr>
-            <a:spLocks noGrp="1"/>
-          </p:cNvSpPr>
-          <p:nvPr>
-            <p:ph type="title"/>
-          </p:nvPr>
-        </p:nvSpPr>
-        <p:spPr/>
-        <p:txBody>
-          <a:bodyPr/>
-          <a:lstStyle/>
-          <a:p>
-            <a:r>
-              <a:rPr lang="ko-KR" altLang="en-US" smtClean="0"/>
-              <a:t>진행조건</a:t>
-            </a:r>
-            <a:endParaRPr lang="ko-KR" altLang="en-US"/>
-          </a:p>
-        </p:txBody>
-      </p:sp>
-      <p:sp>
-        <p:nvSpPr>
-          <p:cNvPr id="3" name="내용 개체 틀 2"/>
-          <p:cNvSpPr>
-            <a:spLocks noGrp="1"/>
-          </p:cNvSpPr>
-          <p:nvPr>
-            <p:ph idx="1"/>
-          </p:nvPr>
-        </p:nvSpPr>
-        <p:spPr/>
-        <p:txBody>
-          <a:bodyPr/>
-          <a:lstStyle/>
-          <a:p>
-            <a:r>
-              <a:rPr lang="ko-KR" altLang="en-US" smtClean="0"/>
-              <a:t>병렬식 </a:t>
-            </a:r>
-            <a:r>
-              <a:rPr lang="en-US" altLang="ko-KR" smtClean="0"/>
-              <a:t>– </a:t>
-            </a:r>
-            <a:r>
-              <a:rPr lang="ko-KR" altLang="en-US" smtClean="0"/>
-              <a:t>어떤 조건을 먼저 시작해도 상관</a:t>
-            </a:r>
-            <a:r>
-              <a:rPr lang="en-US" altLang="ko-KR" smtClean="0"/>
-              <a:t>x</a:t>
-            </a:r>
-          </a:p>
-          <a:p>
-            <a:endParaRPr lang="en-US" altLang="ko-KR"/>
-          </a:p>
-          <a:p>
-            <a:r>
-              <a:rPr lang="ko-KR" altLang="en-US" smtClean="0"/>
-              <a:t>직렬식 </a:t>
-            </a:r>
-            <a:r>
-              <a:rPr lang="en-US" altLang="ko-KR" smtClean="0"/>
-              <a:t>– </a:t>
-            </a:r>
-            <a:r>
-              <a:rPr lang="ko-KR" altLang="en-US" smtClean="0"/>
-              <a:t>이전 조건을 먼저 달성해야 다음 조건 시작 가능</a:t>
-            </a:r>
-            <a:endParaRPr lang="en-US" altLang="ko-KR" smtClean="0"/>
-          </a:p>
-          <a:p>
-            <a:endParaRPr lang="en-US" altLang="ko-KR"/>
-          </a:p>
-          <a:p>
-            <a:r>
-              <a:rPr lang="ko-KR" altLang="en-US" smtClean="0"/>
-              <a:t>어떤 식으로 하든</a:t>
-            </a:r>
-            <a:r>
-              <a:rPr lang="en-US" altLang="ko-KR" smtClean="0"/>
-              <a:t>, </a:t>
-            </a:r>
-            <a:r>
-              <a:rPr lang="ko-KR" altLang="en-US" smtClean="0"/>
-              <a:t>실패 시 어디부터 시작할 지를 설계해야 함</a:t>
-            </a:r>
-            <a:endParaRPr lang="en-US" altLang="ko-KR" smtClean="0"/>
-          </a:p>
-          <a:p>
-            <a:pPr marL="0" indent="0">
-              <a:buNone/>
-            </a:pPr>
-            <a:endParaRPr lang="ko-KR" altLang="en-US"/>
-          </a:p>
-        </p:txBody>
-      </p:sp>
-    </p:spTree>
-    <p:extLst>
-      <p:ext uri="{BB962C8B-B14F-4D97-AF65-F5344CB8AC3E}">
-        <p14:creationId xmlns:p14="http://schemas.microsoft.com/office/powerpoint/2010/main" val="250077212"/>
-      </p:ext>
-    </p:extLst>
-  </p:cSld>
-  <p:clrMapOvr>
-    <a:masterClrMapping/>
-  </p:clrMapOvr>
-</p:sld>
-</file>
-
-<file path=ppt/slides/slide25.xml><?xml version="1.0" encoding="utf-8"?>
-<p:sld xmlns:a="http://schemas.openxmlformats.org/drawingml/2006/main" xmlns:r="http://schemas.openxmlformats.org/officeDocument/2006/relationships" xmlns:p="http://schemas.openxmlformats.org/presentationml/2006/main">
-  <p:cSld>
-    <p:spTree>
-      <p:nvGrpSpPr>
-        <p:cNvPr id="1" name=""/>
-        <p:cNvGrpSpPr/>
-        <p:nvPr/>
-      </p:nvGrpSpPr>
-      <p:grpSpPr>
-        <a:xfrm>
-          <a:off x="0" y="0"/>
-          <a:ext cx="0" cy="0"/>
-          <a:chOff x="0" y="0"/>
-          <a:chExt cx="0" cy="0"/>
-        </a:xfrm>
-      </p:grpSpPr>
-      <p:sp>
-        <p:nvSpPr>
-          <p:cNvPr id="2" name="제목 1"/>
-          <p:cNvSpPr>
-            <a:spLocks noGrp="1"/>
-          </p:cNvSpPr>
-          <p:nvPr>
-            <p:ph type="title"/>
-          </p:nvPr>
-        </p:nvSpPr>
-        <p:spPr/>
-        <p:txBody>
-          <a:bodyPr/>
-          <a:lstStyle/>
-          <a:p>
-            <a:r>
-              <a:rPr lang="ko-KR" altLang="en-US" smtClean="0"/>
-              <a:t>완료 조건</a:t>
-            </a:r>
-            <a:endParaRPr lang="ko-KR" altLang="en-US"/>
-          </a:p>
-        </p:txBody>
-      </p:sp>
-      <p:sp>
-        <p:nvSpPr>
-          <p:cNvPr id="3" name="내용 개체 틀 2"/>
-          <p:cNvSpPr>
-            <a:spLocks noGrp="1"/>
-          </p:cNvSpPr>
-          <p:nvPr>
-            <p:ph idx="1"/>
-          </p:nvPr>
-        </p:nvSpPr>
-        <p:spPr/>
-        <p:txBody>
-          <a:bodyPr/>
-          <a:lstStyle/>
-          <a:p>
-            <a:r>
-              <a:rPr lang="ko-KR" altLang="en-US" smtClean="0"/>
-              <a:t>던전</a:t>
-            </a:r>
-            <a:r>
-              <a:rPr lang="en-US" altLang="ko-KR" smtClean="0"/>
-              <a:t>/</a:t>
-            </a:r>
-            <a:r>
-              <a:rPr lang="ko-KR" altLang="en-US" smtClean="0"/>
-              <a:t>투기장</a:t>
-            </a:r>
-            <a:r>
-              <a:rPr lang="en-US" altLang="ko-KR" smtClean="0"/>
-              <a:t>/</a:t>
-            </a:r>
-            <a:r>
-              <a:rPr lang="ko-KR" altLang="en-US" smtClean="0"/>
-              <a:t>레이드 </a:t>
-            </a:r>
-            <a:r>
-              <a:rPr lang="en-US" altLang="ko-KR" smtClean="0"/>
-              <a:t>– </a:t>
-            </a:r>
-            <a:r>
-              <a:rPr lang="ko-KR" altLang="en-US" smtClean="0"/>
-              <a:t>승리</a:t>
-            </a:r>
-            <a:r>
-              <a:rPr lang="en-US" altLang="ko-KR" smtClean="0"/>
-              <a:t>/</a:t>
-            </a:r>
-            <a:r>
-              <a:rPr lang="ko-KR" altLang="en-US" smtClean="0"/>
-              <a:t>실패</a:t>
-            </a:r>
-            <a:r>
-              <a:rPr lang="en-US" altLang="ko-KR" smtClean="0"/>
-              <a:t>/</a:t>
-            </a:r>
-            <a:r>
-              <a:rPr lang="ko-KR" altLang="en-US" smtClean="0"/>
-              <a:t>무승부 여부</a:t>
-            </a:r>
-            <a:endParaRPr lang="en-US" altLang="ko-KR" smtClean="0"/>
-          </a:p>
-          <a:p>
-            <a:r>
-              <a:rPr lang="ko-KR" altLang="en-US" smtClean="0"/>
-              <a:t>몬스터 킬 </a:t>
-            </a:r>
-            <a:r>
-              <a:rPr lang="en-US" altLang="ko-KR" smtClean="0"/>
-              <a:t>– </a:t>
-            </a:r>
-            <a:r>
-              <a:rPr lang="ko-KR" altLang="en-US" smtClean="0"/>
-              <a:t>파티 인원수 </a:t>
-            </a:r>
-            <a:r>
-              <a:rPr lang="en-US" altLang="ko-KR" smtClean="0"/>
-              <a:t>full </a:t>
-            </a:r>
-            <a:r>
-              <a:rPr lang="ko-KR" altLang="en-US" smtClean="0"/>
-              <a:t>체크</a:t>
-            </a:r>
-            <a:endParaRPr lang="en-US" altLang="ko-KR" smtClean="0"/>
-          </a:p>
-          <a:p>
-            <a:r>
-              <a:rPr lang="ko-KR" altLang="en-US" smtClean="0"/>
-              <a:t>위치 정보</a:t>
-            </a:r>
-            <a:endParaRPr lang="en-US" altLang="ko-KR" smtClean="0"/>
-          </a:p>
-          <a:p>
-            <a:r>
-              <a:rPr lang="ko-KR" altLang="en-US" smtClean="0"/>
-              <a:t>아이템 습득</a:t>
-            </a:r>
-            <a:r>
-              <a:rPr lang="en-US" altLang="ko-KR" smtClean="0"/>
-              <a:t>/</a:t>
-            </a:r>
-            <a:r>
-              <a:rPr lang="ko-KR" altLang="en-US" smtClean="0"/>
-              <a:t>강화</a:t>
-            </a:r>
-            <a:r>
-              <a:rPr lang="en-US" altLang="ko-KR" smtClean="0"/>
-              <a:t>/</a:t>
-            </a:r>
-            <a:r>
-              <a:rPr lang="ko-KR" altLang="en-US" smtClean="0"/>
-              <a:t>착용</a:t>
-            </a:r>
-            <a:endParaRPr lang="en-US" altLang="ko-KR" smtClean="0"/>
-          </a:p>
-          <a:p>
-            <a:r>
-              <a:rPr lang="ko-KR" altLang="en-US" smtClean="0"/>
-              <a:t>스킬 습득</a:t>
-            </a:r>
-            <a:r>
-              <a:rPr lang="en-US" altLang="ko-KR" smtClean="0"/>
-              <a:t>/</a:t>
-            </a:r>
-            <a:r>
-              <a:rPr lang="ko-KR" altLang="en-US" smtClean="0"/>
-              <a:t>사용</a:t>
-            </a:r>
-            <a:endParaRPr lang="en-US" altLang="ko-KR" smtClean="0"/>
-          </a:p>
-          <a:p>
-            <a:r>
-              <a:rPr lang="ko-KR" altLang="en-US" smtClean="0"/>
-              <a:t>기능 사용 </a:t>
-            </a:r>
-            <a:r>
-              <a:rPr lang="en-US" altLang="ko-KR" smtClean="0"/>
-              <a:t>- </a:t>
-            </a:r>
-            <a:r>
-              <a:rPr lang="ko-KR" altLang="en-US" smtClean="0"/>
-              <a:t>트리거</a:t>
-            </a:r>
-            <a:endParaRPr lang="en-US" altLang="ko-KR" smtClean="0"/>
-          </a:p>
-          <a:p>
-            <a:endParaRPr lang="ko-KR" altLang="en-US"/>
-          </a:p>
-        </p:txBody>
-      </p:sp>
-    </p:spTree>
-    <p:extLst>
-      <p:ext uri="{BB962C8B-B14F-4D97-AF65-F5344CB8AC3E}">
-        <p14:creationId xmlns:p14="http://schemas.microsoft.com/office/powerpoint/2010/main" val="2025018391"/>
-      </p:ext>
-    </p:extLst>
-  </p:cSld>
-  <p:clrMapOvr>
-    <a:masterClrMapping/>
-  </p:clrMapOvr>
-</p:sld>
-</file>
-
-<file path=ppt/slides/slide26.xml><?xml version="1.0" encoding="utf-8"?>
-<p:sld xmlns:a="http://schemas.openxmlformats.org/drawingml/2006/main" xmlns:r="http://schemas.openxmlformats.org/officeDocument/2006/relationships" xmlns:p="http://schemas.openxmlformats.org/presentationml/2006/main">
-  <p:cSld>
-    <p:spTree>
-      <p:nvGrpSpPr>
-        <p:cNvPr id="1" name=""/>
-        <p:cNvGrpSpPr/>
-        <p:nvPr/>
-      </p:nvGrpSpPr>
-      <p:grpSpPr>
-        <a:xfrm>
-          <a:off x="0" y="0"/>
-          <a:ext cx="0" cy="0"/>
-          <a:chOff x="0" y="0"/>
-          <a:chExt cx="0" cy="0"/>
-        </a:xfrm>
-      </p:grpSpPr>
-      <p:sp>
-        <p:nvSpPr>
-          <p:cNvPr id="2" name="제목 1"/>
-          <p:cNvSpPr>
-            <a:spLocks noGrp="1"/>
-          </p:cNvSpPr>
-          <p:nvPr>
-            <p:ph type="title"/>
-          </p:nvPr>
-        </p:nvSpPr>
-        <p:spPr/>
-        <p:txBody>
-          <a:bodyPr/>
-          <a:lstStyle/>
-          <a:p>
-            <a:r>
-              <a:rPr lang="ko-KR" altLang="en-US" smtClean="0"/>
-              <a:t>완료보상 조건</a:t>
-            </a:r>
-            <a:endParaRPr lang="ko-KR" altLang="en-US"/>
-          </a:p>
-        </p:txBody>
-      </p:sp>
-      <p:sp>
-        <p:nvSpPr>
-          <p:cNvPr id="3" name="내용 개체 틀 2"/>
-          <p:cNvSpPr>
-            <a:spLocks noGrp="1"/>
-          </p:cNvSpPr>
-          <p:nvPr>
-            <p:ph idx="1"/>
-          </p:nvPr>
-        </p:nvSpPr>
-        <p:spPr/>
-        <p:txBody>
-          <a:bodyPr/>
-          <a:lstStyle/>
-          <a:p>
-            <a:r>
-              <a:rPr lang="ko-KR" altLang="en-US" smtClean="0"/>
-              <a:t>완료 조건 달성 후 해당 퀘스트는 </a:t>
-            </a:r>
-            <a:r>
-              <a:rPr lang="en-US" altLang="ko-KR" smtClean="0"/>
-              <a:t>On </a:t>
-            </a:r>
-            <a:r>
-              <a:rPr lang="ko-KR" altLang="en-US" smtClean="0"/>
-              <a:t>기록</a:t>
-            </a:r>
-            <a:endParaRPr lang="ko-KR" altLang="en-US"/>
-          </a:p>
-        </p:txBody>
-      </p:sp>
-    </p:spTree>
-    <p:extLst>
-      <p:ext uri="{BB962C8B-B14F-4D97-AF65-F5344CB8AC3E}">
-        <p14:creationId xmlns:p14="http://schemas.microsoft.com/office/powerpoint/2010/main" val="1217659274"/>
       </p:ext>
     </p:extLst>
   </p:cSld>
@@ -5515,10 +3434,9 @@
           <a:lstStyle/>
           <a:p>
             <a:r>
-              <a:rPr lang="ko-KR" altLang="en-US" smtClean="0"/>
+              <a:rPr lang="ko-KR" altLang="en-US"/>
               <a:t>진행 조건</a:t>
             </a:r>
-            <a:endParaRPr lang="ko-KR" altLang="en-US"/>
           </a:p>
         </p:txBody>
       </p:sp>
@@ -5545,207 +3463,195 @@
           <a:lstStyle/>
           <a:p>
             <a:r>
-              <a:rPr lang="ko-KR" altLang="en-US" smtClean="0"/>
+              <a:rPr lang="ko-KR" altLang="en-US"/>
               <a:t>직렬식 조건 </a:t>
             </a:r>
             <a:r>
-              <a:rPr lang="en-US" altLang="ko-KR" smtClean="0"/>
+              <a:rPr lang="en-US" altLang="ko-KR"/>
               <a:t>(Direct) : </a:t>
             </a:r>
             <a:r>
-              <a:rPr lang="ko-KR" altLang="en-US" smtClean="0"/>
+              <a:rPr lang="ko-KR" altLang="en-US"/>
               <a:t>순서상</a:t>
             </a:r>
             <a:r>
-              <a:rPr lang="en-US" altLang="ko-KR" smtClean="0"/>
+              <a:rPr lang="en-US" altLang="ko-KR"/>
               <a:t>, </a:t>
             </a:r>
             <a:r>
-              <a:rPr lang="ko-KR" altLang="en-US" smtClean="0"/>
+              <a:rPr lang="ko-KR" altLang="en-US"/>
               <a:t>이전의 조건을 달성해야 다음 조건을 수행할 수 있는 조건</a:t>
             </a:r>
-            <a:endParaRPr lang="en-US" altLang="ko-KR" smtClean="0"/>
+            <a:endParaRPr lang="en-US" altLang="ko-KR"/>
           </a:p>
           <a:p>
             <a:pPr lvl="1"/>
             <a:r>
-              <a:rPr lang="ko-KR" altLang="en-US" smtClean="0"/>
+              <a:rPr lang="ko-KR" altLang="en-US"/>
               <a:t>예</a:t>
             </a:r>
             <a:r>
-              <a:rPr lang="en-US" altLang="ko-KR" smtClean="0"/>
+              <a:rPr lang="en-US" altLang="ko-KR"/>
               <a:t>1) </a:t>
             </a:r>
             <a:r>
-              <a:rPr lang="ko-KR" altLang="en-US" smtClean="0"/>
+              <a:rPr lang="ko-KR" altLang="en-US"/>
               <a:t>조건</a:t>
             </a:r>
             <a:r>
-              <a:rPr lang="en-US" altLang="ko-KR" smtClean="0"/>
+              <a:rPr lang="en-US" altLang="ko-KR"/>
               <a:t>1 </a:t>
             </a:r>
             <a:r>
-              <a:rPr lang="ko-KR" altLang="en-US" smtClean="0"/>
+              <a:rPr lang="ko-KR" altLang="en-US"/>
               <a:t>성공 후 조건</a:t>
             </a:r>
             <a:r>
-              <a:rPr lang="en-US" altLang="ko-KR" smtClean="0"/>
+              <a:rPr lang="en-US" altLang="ko-KR"/>
               <a:t>2 </a:t>
             </a:r>
             <a:r>
-              <a:rPr lang="ko-KR" altLang="en-US" smtClean="0"/>
+              <a:rPr lang="ko-KR" altLang="en-US"/>
               <a:t>실패 시</a:t>
             </a:r>
-            <a:r>
-              <a:rPr lang="en-US" altLang="ko-KR"/>
-              <a:t/>
-            </a:r>
             <a:br>
               <a:rPr lang="en-US" altLang="ko-KR"/>
             </a:br>
             <a:r>
-              <a:rPr lang="en-US" altLang="ko-KR" smtClean="0"/>
+              <a:rPr lang="en-US" altLang="ko-KR"/>
               <a:t>	   =&gt; </a:t>
             </a:r>
             <a:r>
-              <a:rPr lang="ko-KR" altLang="en-US" smtClean="0"/>
+              <a:rPr lang="ko-KR" altLang="en-US"/>
               <a:t>조건</a:t>
             </a:r>
             <a:r>
-              <a:rPr lang="en-US" altLang="ko-KR" smtClean="0"/>
+              <a:rPr lang="en-US" altLang="ko-KR"/>
               <a:t>1</a:t>
             </a:r>
             <a:r>
-              <a:rPr lang="ko-KR" altLang="en-US" smtClean="0"/>
+              <a:rPr lang="ko-KR" altLang="en-US"/>
               <a:t>부터 다시</a:t>
             </a:r>
-            <a:r>
-              <a:rPr lang="en-US" altLang="ko-KR"/>
-              <a:t/>
-            </a:r>
             <a:br>
               <a:rPr lang="en-US" altLang="ko-KR"/>
             </a:br>
             <a:r>
-              <a:rPr lang="en-US" altLang="ko-KR" smtClean="0"/>
+              <a:rPr lang="en-US" altLang="ko-KR"/>
               <a:t>	   =&gt; </a:t>
             </a:r>
             <a:r>
-              <a:rPr lang="ko-KR" altLang="en-US" smtClean="0"/>
+              <a:rPr lang="ko-KR" altLang="en-US"/>
               <a:t>조건</a:t>
             </a:r>
             <a:r>
-              <a:rPr lang="en-US" altLang="ko-KR" smtClean="0"/>
+              <a:rPr lang="en-US" altLang="ko-KR"/>
               <a:t>2 </a:t>
             </a:r>
             <a:r>
-              <a:rPr lang="ko-KR" altLang="en-US" smtClean="0"/>
+              <a:rPr lang="ko-KR" altLang="en-US"/>
               <a:t>앞에서부터 다시</a:t>
             </a:r>
-            <a:endParaRPr lang="en-US" altLang="ko-KR" smtClean="0"/>
+            <a:endParaRPr lang="en-US" altLang="ko-KR"/>
           </a:p>
           <a:p>
             <a:pPr lvl="1"/>
             <a:r>
-              <a:rPr lang="ko-KR" altLang="en-US" smtClean="0"/>
+              <a:rPr lang="ko-KR" altLang="en-US"/>
               <a:t>예</a:t>
             </a:r>
             <a:r>
-              <a:rPr lang="en-US" altLang="ko-KR" smtClean="0"/>
+              <a:rPr lang="en-US" altLang="ko-KR"/>
               <a:t>2) 5</a:t>
             </a:r>
             <a:r>
-              <a:rPr lang="ko-KR" altLang="en-US" smtClean="0"/>
+              <a:rPr lang="ko-KR" altLang="en-US"/>
               <a:t>분 안에 조건 </a:t>
             </a:r>
             <a:r>
-              <a:rPr lang="en-US" altLang="ko-KR" smtClean="0"/>
+              <a:rPr lang="en-US" altLang="ko-KR"/>
               <a:t>3</a:t>
             </a:r>
             <a:r>
-              <a:rPr lang="ko-KR" altLang="en-US" smtClean="0"/>
+              <a:rPr lang="ko-KR" altLang="en-US"/>
               <a:t>개 달성하기</a:t>
             </a:r>
-            <a:r>
-              <a:rPr lang="en-US" altLang="ko-KR" smtClean="0"/>
-              <a:t/>
-            </a:r>
             <a:br>
-              <a:rPr lang="en-US" altLang="ko-KR" smtClean="0"/>
+              <a:rPr lang="en-US" altLang="ko-KR"/>
             </a:br>
             <a:r>
-              <a:rPr lang="en-US" altLang="ko-KR" smtClean="0"/>
+              <a:rPr lang="en-US" altLang="ko-KR"/>
               <a:t>	   =&gt; </a:t>
             </a:r>
             <a:r>
-              <a:rPr lang="ko-KR" altLang="en-US" smtClean="0"/>
+              <a:rPr lang="ko-KR" altLang="en-US"/>
               <a:t>조건</a:t>
             </a:r>
             <a:r>
-              <a:rPr lang="en-US" altLang="ko-KR" smtClean="0"/>
+              <a:rPr lang="en-US" altLang="ko-KR"/>
               <a:t>3</a:t>
             </a:r>
             <a:r>
-              <a:rPr lang="ko-KR" altLang="en-US" smtClean="0"/>
+              <a:rPr lang="ko-KR" altLang="en-US"/>
               <a:t>을 실패하면 </a:t>
             </a:r>
             <a:r>
-              <a:rPr lang="en-US" altLang="ko-KR" smtClean="0"/>
+              <a:rPr lang="en-US" altLang="ko-KR"/>
               <a:t>-&gt; </a:t>
             </a:r>
             <a:r>
-              <a:rPr lang="ko-KR" altLang="en-US" smtClean="0"/>
+              <a:rPr lang="ko-KR" altLang="en-US"/>
               <a:t>조건</a:t>
             </a:r>
             <a:r>
-              <a:rPr lang="en-US" altLang="ko-KR" smtClean="0"/>
+              <a:rPr lang="en-US" altLang="ko-KR"/>
               <a:t>1</a:t>
             </a:r>
             <a:r>
-              <a:rPr lang="ko-KR" altLang="en-US" smtClean="0"/>
+              <a:rPr lang="ko-KR" altLang="en-US"/>
               <a:t>부터 다시</a:t>
             </a:r>
-            <a:endParaRPr lang="en-US" altLang="ko-KR" smtClean="0"/>
-          </a:p>
-          <a:p>
-            <a:r>
-              <a:rPr lang="ko-KR" altLang="en-US" smtClean="0"/>
+            <a:endParaRPr lang="en-US" altLang="ko-KR"/>
+          </a:p>
+          <a:p>
+            <a:r>
+              <a:rPr lang="ko-KR" altLang="en-US"/>
               <a:t>병렬식 조건 </a:t>
             </a:r>
             <a:r>
-              <a:rPr lang="en-US" altLang="ko-KR" smtClean="0"/>
+              <a:rPr lang="en-US" altLang="ko-KR"/>
               <a:t>: </a:t>
             </a:r>
             <a:r>
-              <a:rPr lang="ko-KR" altLang="en-US" smtClean="0"/>
+              <a:rPr lang="ko-KR" altLang="en-US"/>
               <a:t>조건</a:t>
             </a:r>
             <a:r>
-              <a:rPr lang="en-US" altLang="ko-KR" smtClean="0"/>
+              <a:rPr lang="en-US" altLang="ko-KR"/>
               <a:t>1~3 </a:t>
             </a:r>
             <a:r>
-              <a:rPr lang="ko-KR" altLang="en-US" smtClean="0"/>
+              <a:rPr lang="ko-KR" altLang="en-US"/>
               <a:t>중 어떤 조건을 먼저 시작하든 상관업다</a:t>
             </a:r>
             <a:r>
-              <a:rPr lang="en-US" altLang="ko-KR" smtClean="0"/>
+              <a:rPr lang="en-US" altLang="ko-KR"/>
               <a:t>. </a:t>
             </a:r>
             <a:r>
-              <a:rPr lang="ko-KR" altLang="en-US" smtClean="0"/>
+              <a:rPr lang="ko-KR" altLang="en-US"/>
               <a:t>조건 </a:t>
             </a:r>
             <a:r>
-              <a:rPr lang="en-US" altLang="ko-KR" smtClean="0"/>
+              <a:rPr lang="en-US" altLang="ko-KR"/>
               <a:t>3</a:t>
             </a:r>
             <a:r>
-              <a:rPr lang="ko-KR" altLang="en-US" smtClean="0"/>
+              <a:rPr lang="ko-KR" altLang="en-US"/>
               <a:t>개를 모두 달성하기만 하면 된다</a:t>
             </a:r>
             <a:r>
-              <a:rPr lang="en-US" altLang="ko-KR" smtClean="0"/>
+              <a:rPr lang="en-US" altLang="ko-KR"/>
               <a:t>.</a:t>
             </a:r>
           </a:p>
@@ -5797,10 +3703,9 @@
           <a:lstStyle/>
           <a:p>
             <a:r>
-              <a:rPr lang="ko-KR" altLang="en-US" smtClean="0"/>
+              <a:rPr lang="ko-KR" altLang="en-US"/>
               <a:t>진행 조건</a:t>
             </a:r>
-            <a:endParaRPr lang="ko-KR" altLang="en-US"/>
           </a:p>
         </p:txBody>
       </p:sp>
@@ -5827,94 +3732,94 @@
           <a:lstStyle/>
           <a:p>
             <a:r>
-              <a:rPr lang="ko-KR" altLang="en-US" smtClean="0"/>
+              <a:rPr lang="ko-KR" altLang="en-US"/>
               <a:t>진행 조건은 직렬과 병렬 구성</a:t>
             </a:r>
             <a:r>
-              <a:rPr lang="en-US" altLang="ko-KR" smtClean="0"/>
+              <a:rPr lang="en-US" altLang="ko-KR"/>
               <a:t>, </a:t>
             </a:r>
             <a:r>
-              <a:rPr lang="ko-KR" altLang="en-US" smtClean="0"/>
+              <a:rPr lang="ko-KR" altLang="en-US"/>
               <a:t>실패 시 어디서부터 다시 시작할 지를 구성하는 게 중요</a:t>
             </a:r>
-            <a:endParaRPr lang="en-US" altLang="ko-KR" smtClean="0"/>
-          </a:p>
-          <a:p>
-            <a:r>
-              <a:rPr lang="ko-KR" altLang="en-US" smtClean="0"/>
+            <a:endParaRPr lang="en-US" altLang="ko-KR"/>
+          </a:p>
+          <a:p>
+            <a:r>
+              <a:rPr lang="ko-KR" altLang="en-US"/>
               <a:t>실패했을 때 분기가 달라지는 경우도 있다</a:t>
             </a:r>
             <a:r>
-              <a:rPr lang="en-US" altLang="ko-KR" smtClean="0"/>
+              <a:rPr lang="en-US" altLang="ko-KR"/>
               <a:t>.</a:t>
             </a:r>
           </a:p>
           <a:p>
             <a:r>
-              <a:rPr lang="ko-KR" altLang="en-US" smtClean="0"/>
+              <a:rPr lang="ko-KR" altLang="en-US"/>
               <a:t>온라인 게임은 경쟁과 협동을 주요 요소로 하기 때문에</a:t>
             </a:r>
             <a:r>
-              <a:rPr lang="en-US" altLang="ko-KR" smtClean="0"/>
+              <a:rPr lang="en-US" altLang="ko-KR"/>
               <a:t>, </a:t>
             </a:r>
             <a:r>
-              <a:rPr lang="ko-KR" altLang="en-US" smtClean="0"/>
+              <a:rPr lang="ko-KR" altLang="en-US"/>
               <a:t>실패를 통해 분기를 만들어놓으면 상대적 박탈감을 느낄 수 있다</a:t>
             </a:r>
             <a:r>
-              <a:rPr lang="en-US" altLang="ko-KR" smtClean="0"/>
+              <a:rPr lang="en-US" altLang="ko-KR"/>
               <a:t>.</a:t>
             </a:r>
           </a:p>
           <a:p>
             <a:r>
-              <a:rPr lang="ko-KR" altLang="en-US" smtClean="0"/>
+              <a:rPr lang="ko-KR" altLang="en-US"/>
               <a:t>따라서 보상에 차등을 준다</a:t>
             </a:r>
             <a:r>
-              <a:rPr lang="en-US" altLang="ko-KR" smtClean="0"/>
+              <a:rPr lang="en-US" altLang="ko-KR"/>
               <a:t>.</a:t>
             </a:r>
           </a:p>
           <a:p>
             <a:r>
-              <a:rPr lang="en-US" altLang="ko-KR" smtClean="0"/>
+              <a:rPr lang="en-US" altLang="ko-KR"/>
               <a:t>But </a:t>
             </a:r>
             <a:r>
-              <a:rPr lang="ko-KR" altLang="en-US" smtClean="0"/>
+              <a:rPr lang="ko-KR" altLang="en-US"/>
               <a:t>형평성 문제를 제시한다</a:t>
             </a:r>
             <a:r>
-              <a:rPr lang="en-US" altLang="ko-KR" smtClean="0"/>
+              <a:rPr lang="en-US" altLang="ko-KR"/>
               <a:t>. </a:t>
             </a:r>
             <a:r>
-              <a:rPr lang="ko-KR" altLang="en-US" smtClean="0"/>
+              <a:rPr lang="ko-KR" altLang="en-US"/>
               <a:t>따라서 온라인 게임은 분기를 안 만드는 게 좋다</a:t>
             </a:r>
             <a:r>
-              <a:rPr lang="en-US" altLang="ko-KR" smtClean="0"/>
+              <a:rPr lang="en-US" altLang="ko-KR"/>
               <a:t>.</a:t>
             </a:r>
           </a:p>
           <a:p>
             <a:r>
-              <a:rPr lang="ko-KR" altLang="en-US" smtClean="0"/>
+              <a:rPr lang="ko-KR" altLang="en-US"/>
               <a:t>분기가 있는 척 하고</a:t>
             </a:r>
             <a:r>
-              <a:rPr lang="en-US" altLang="ko-KR" smtClean="0"/>
+              <a:rPr lang="en-US" altLang="ko-KR"/>
               <a:t>, </a:t>
             </a:r>
             <a:r>
-              <a:rPr lang="ko-KR" altLang="en-US" smtClean="0"/>
+              <a:rPr lang="ko-KR" altLang="en-US"/>
               <a:t>어떤 루트로 가든 보상이 같게 해야 한다</a:t>
             </a:r>
             <a:r>
-              <a:rPr lang="en-US" altLang="ko-KR" smtClean="0"/>
+              <a:rPr lang="en-US" altLang="ko-KR"/>
               <a:t>.</a:t>
             </a:r>
           </a:p>
@@ -5923,11 +3828,11 @@
           </a:p>
           <a:p>
             <a:r>
-              <a:rPr lang="ko-KR" altLang="en-US" smtClean="0"/>
+              <a:rPr lang="ko-KR" altLang="en-US"/>
               <a:t>콘솔 게임은 실패를 체크한다</a:t>
             </a:r>
             <a:r>
-              <a:rPr lang="en-US" altLang="ko-KR" smtClean="0"/>
+              <a:rPr lang="en-US" altLang="ko-KR"/>
               <a:t>.</a:t>
             </a:r>
             <a:endParaRPr lang="ko-KR" altLang="en-US"/>
@@ -5980,10 +3885,9 @@
           <a:lstStyle/>
           <a:p>
             <a:r>
-              <a:rPr lang="ko-KR" altLang="en-US" smtClean="0"/>
+              <a:rPr lang="ko-KR" altLang="en-US"/>
               <a:t>완료조건</a:t>
             </a:r>
-            <a:endParaRPr lang="ko-KR" altLang="en-US"/>
           </a:p>
         </p:txBody>
       </p:sp>
@@ -6010,203 +3914,203 @@
           <a:lstStyle/>
           <a:p>
             <a:r>
-              <a:rPr lang="ko-KR" altLang="en-US" smtClean="0"/>
+              <a:rPr lang="ko-KR" altLang="en-US"/>
               <a:t>콘텐츠를 수행했니</a:t>
             </a:r>
             <a:r>
-              <a:rPr lang="en-US" altLang="ko-KR" smtClean="0"/>
+              <a:rPr lang="en-US" altLang="ko-KR"/>
               <a:t>? </a:t>
             </a:r>
             <a:r>
-              <a:rPr lang="ko-KR" altLang="en-US" smtClean="0"/>
+              <a:rPr lang="ko-KR" altLang="en-US"/>
               <a:t>시스템을 수행하는 경험을 했니</a:t>
             </a:r>
             <a:r>
-              <a:rPr lang="en-US" altLang="ko-KR" smtClean="0"/>
+              <a:rPr lang="en-US" altLang="ko-KR"/>
               <a:t>?</a:t>
             </a:r>
           </a:p>
           <a:p>
-            <a:endParaRPr lang="en-US" altLang="ko-KR" smtClean="0"/>
-          </a:p>
-          <a:p>
-            <a:r>
-              <a:rPr lang="ko-KR" altLang="en-US" smtClean="0"/>
+            <a:endParaRPr lang="en-US" altLang="ko-KR"/>
+          </a:p>
+          <a:p>
+            <a:r>
+              <a:rPr lang="ko-KR" altLang="en-US"/>
               <a:t>던전</a:t>
             </a:r>
             <a:r>
-              <a:rPr lang="en-US" altLang="ko-KR" smtClean="0"/>
+              <a:rPr lang="en-US" altLang="ko-KR"/>
               <a:t>/</a:t>
             </a:r>
             <a:r>
-              <a:rPr lang="ko-KR" altLang="en-US" smtClean="0"/>
+              <a:rPr lang="ko-KR" altLang="en-US"/>
               <a:t>투기장을 경험해봤니</a:t>
             </a:r>
             <a:r>
-              <a:rPr lang="en-US" altLang="ko-KR" smtClean="0"/>
+              <a:rPr lang="en-US" altLang="ko-KR"/>
               <a:t>?</a:t>
             </a:r>
           </a:p>
           <a:p>
             <a:pPr lvl="1"/>
             <a:r>
-              <a:rPr lang="en-US" altLang="ko-KR" smtClean="0"/>
+              <a:rPr lang="en-US" altLang="ko-KR"/>
               <a:t>Detail(</a:t>
             </a:r>
             <a:r>
-              <a:rPr lang="ko-KR" altLang="en-US" smtClean="0"/>
+              <a:rPr lang="ko-KR" altLang="en-US"/>
               <a:t>승리</a:t>
             </a:r>
             <a:r>
-              <a:rPr lang="en-US" altLang="ko-KR" smtClean="0"/>
+              <a:rPr lang="en-US" altLang="ko-KR"/>
               <a:t>/</a:t>
             </a:r>
             <a:r>
-              <a:rPr lang="ko-KR" altLang="en-US" smtClean="0"/>
+              <a:rPr lang="ko-KR" altLang="en-US"/>
               <a:t>실패</a:t>
             </a:r>
             <a:r>
-              <a:rPr lang="en-US" altLang="ko-KR" smtClean="0"/>
+              <a:rPr lang="en-US" altLang="ko-KR"/>
               <a:t>/</a:t>
             </a:r>
             <a:r>
-              <a:rPr lang="ko-KR" altLang="en-US" smtClean="0"/>
+              <a:rPr lang="ko-KR" altLang="en-US"/>
               <a:t>무승부</a:t>
             </a:r>
             <a:r>
-              <a:rPr lang="en-US" altLang="ko-KR" smtClean="0"/>
+              <a:rPr lang="en-US" altLang="ko-KR"/>
               <a:t>)</a:t>
             </a:r>
             <a:r>
-              <a:rPr lang="ko-KR" altLang="en-US" smtClean="0"/>
+              <a:rPr lang="ko-KR" altLang="en-US"/>
               <a:t>이 유저마다 너무 다르다</a:t>
             </a:r>
             <a:r>
-              <a:rPr lang="en-US" altLang="ko-KR" smtClean="0"/>
+              <a:rPr lang="en-US" altLang="ko-KR"/>
               <a:t>. </a:t>
             </a:r>
             <a:r>
-              <a:rPr lang="ko-KR" altLang="en-US" smtClean="0"/>
+              <a:rPr lang="ko-KR" altLang="en-US"/>
               <a:t>따라서 참여 여부만 묻는 경우가 많다</a:t>
             </a:r>
             <a:r>
-              <a:rPr lang="en-US" altLang="ko-KR" smtClean="0"/>
+              <a:rPr lang="en-US" altLang="ko-KR"/>
               <a:t>.</a:t>
             </a:r>
           </a:p>
           <a:p>
             <a:pPr lvl="1"/>
             <a:r>
-              <a:rPr lang="ko-KR" altLang="en-US" smtClean="0"/>
+              <a:rPr lang="ko-KR" altLang="en-US"/>
               <a:t>개발자는 유저가 콘텐츠를 경험하게 하고</a:t>
             </a:r>
             <a:r>
-              <a:rPr lang="en-US" altLang="ko-KR" smtClean="0"/>
+              <a:rPr lang="en-US" altLang="ko-KR"/>
               <a:t>, </a:t>
             </a:r>
             <a:r>
-              <a:rPr lang="ko-KR" altLang="en-US" smtClean="0"/>
+              <a:rPr lang="ko-KR" altLang="en-US"/>
               <a:t>유저가 재미를 느끼게 하기 위해서 참여를 유도하는 게 매우 중요하다</a:t>
             </a:r>
             <a:r>
-              <a:rPr lang="en-US" altLang="ko-KR" smtClean="0"/>
+              <a:rPr lang="en-US" altLang="ko-KR"/>
               <a:t>.</a:t>
             </a:r>
           </a:p>
           <a:p>
             <a:pPr lvl="1"/>
             <a:r>
-              <a:rPr lang="ko-KR" altLang="en-US" smtClean="0"/>
+              <a:rPr lang="ko-KR" altLang="en-US"/>
               <a:t>승리</a:t>
             </a:r>
             <a:r>
-              <a:rPr lang="en-US" altLang="ko-KR" smtClean="0"/>
+              <a:rPr lang="en-US" altLang="ko-KR"/>
               <a:t>/</a:t>
             </a:r>
             <a:r>
-              <a:rPr lang="ko-KR" altLang="en-US" smtClean="0"/>
+              <a:rPr lang="ko-KR" altLang="en-US"/>
               <a:t>실패</a:t>
             </a:r>
             <a:r>
-              <a:rPr lang="en-US" altLang="ko-KR" smtClean="0"/>
+              <a:rPr lang="en-US" altLang="ko-KR"/>
               <a:t>(</a:t>
             </a:r>
             <a:r>
-              <a:rPr lang="ko-KR" altLang="en-US" smtClean="0"/>
+              <a:rPr lang="ko-KR" altLang="en-US"/>
               <a:t>콘솔 게임 외에는 </a:t>
             </a:r>
             <a:r>
-              <a:rPr lang="en-US" altLang="ko-KR" smtClean="0"/>
+              <a:rPr lang="en-US" altLang="ko-KR"/>
               <a:t>‘</a:t>
             </a:r>
             <a:r>
-              <a:rPr lang="ko-KR" altLang="en-US" smtClean="0"/>
+              <a:rPr lang="ko-KR" altLang="en-US"/>
               <a:t>실패</a:t>
             </a:r>
             <a:r>
-              <a:rPr lang="en-US" altLang="ko-KR" smtClean="0"/>
+              <a:rPr lang="en-US" altLang="ko-KR"/>
               <a:t>‘</a:t>
             </a:r>
             <a:r>
-              <a:rPr lang="ko-KR" altLang="en-US" smtClean="0"/>
+              <a:rPr lang="ko-KR" altLang="en-US"/>
               <a:t>를 잘 체크하지 않는다</a:t>
             </a:r>
             <a:r>
-              <a:rPr lang="en-US" altLang="ko-KR" smtClean="0"/>
+              <a:rPr lang="en-US" altLang="ko-KR"/>
               <a:t>.)/</a:t>
             </a:r>
             <a:r>
-              <a:rPr lang="ko-KR" altLang="en-US" smtClean="0"/>
+              <a:rPr lang="ko-KR" altLang="en-US"/>
               <a:t>무승부 같은 디테일을 세부적으로 잘 만들어야 한다</a:t>
             </a:r>
             <a:r>
-              <a:rPr lang="en-US" altLang="ko-KR" smtClean="0"/>
+              <a:rPr lang="en-US" altLang="ko-KR"/>
               <a:t>.</a:t>
             </a:r>
           </a:p>
           <a:p>
             <a:pPr lvl="1"/>
             <a:r>
-              <a:rPr lang="ko-KR" altLang="en-US" smtClean="0"/>
+              <a:rPr lang="ko-KR" altLang="en-US"/>
               <a:t>실패를 체크하면</a:t>
             </a:r>
             <a:r>
-              <a:rPr lang="en-US" altLang="ko-KR" smtClean="0"/>
+              <a:rPr lang="en-US" altLang="ko-KR"/>
               <a:t>, </a:t>
             </a:r>
             <a:r>
-              <a:rPr lang="ko-KR" altLang="en-US" smtClean="0"/>
+              <a:rPr lang="ko-KR" altLang="en-US"/>
               <a:t>어뷰징 유저들이 늘어날 수 있다</a:t>
             </a:r>
             <a:r>
-              <a:rPr lang="en-US" altLang="ko-KR" smtClean="0"/>
+              <a:rPr lang="en-US" altLang="ko-KR"/>
               <a:t>.</a:t>
             </a:r>
           </a:p>
           <a:p>
             <a:pPr lvl="2"/>
             <a:r>
-              <a:rPr lang="ko-KR" altLang="en-US" smtClean="0"/>
+              <a:rPr lang="ko-KR" altLang="en-US"/>
               <a:t>유저는 </a:t>
             </a:r>
             <a:r>
-              <a:rPr lang="en-US" altLang="ko-KR" smtClean="0"/>
+              <a:rPr lang="en-US" altLang="ko-KR"/>
               <a:t>‘</a:t>
             </a:r>
             <a:r>
-              <a:rPr lang="ko-KR" altLang="en-US" smtClean="0"/>
+              <a:rPr lang="ko-KR" altLang="en-US"/>
               <a:t>성장</a:t>
             </a:r>
             <a:r>
-              <a:rPr lang="en-US" altLang="ko-KR" smtClean="0"/>
+              <a:rPr lang="en-US" altLang="ko-KR"/>
               <a:t>＇</a:t>
             </a:r>
             <a:r>
-              <a:rPr lang="ko-KR" altLang="en-US" smtClean="0"/>
+              <a:rPr lang="ko-KR" altLang="en-US"/>
               <a:t>이 더 중요하기 때문에 퀘스트 완수에 목표를 더 둔다</a:t>
             </a:r>
             <a:r>
-              <a:rPr lang="en-US" altLang="ko-KR" smtClean="0"/>
+              <a:rPr lang="en-US" altLang="ko-KR"/>
               <a:t>.</a:t>
             </a:r>
           </a:p>
@@ -6261,10 +4165,9 @@
           <a:lstStyle/>
           <a:p>
             <a:r>
-              <a:rPr lang="ko-KR" altLang="en-US" smtClean="0"/>
+              <a:rPr lang="ko-KR" altLang="en-US"/>
               <a:t>완료조건</a:t>
             </a:r>
-            <a:endParaRPr lang="ko-KR" altLang="en-US"/>
           </a:p>
         </p:txBody>
       </p:sp>
@@ -6291,76 +4194,75 @@
           <a:lstStyle/>
           <a:p>
             <a:r>
-              <a:rPr lang="ko-KR" altLang="en-US" smtClean="0"/>
+              <a:rPr lang="ko-KR" altLang="en-US"/>
               <a:t>몬스터를 잡았니</a:t>
             </a:r>
             <a:r>
-              <a:rPr lang="en-US" altLang="ko-KR" smtClean="0"/>
+              <a:rPr lang="en-US" altLang="ko-KR"/>
               <a:t>?</a:t>
             </a:r>
-            <a:endParaRPr lang="en-US" altLang="ko-KR"/>
-          </a:p>
-          <a:p>
-            <a:r>
-              <a:rPr lang="ko-KR" altLang="en-US" smtClean="0"/>
+          </a:p>
+          <a:p>
+            <a:r>
+              <a:rPr lang="ko-KR" altLang="en-US"/>
               <a:t>소극적인 유저들에게 부담을 주지 않게 잘 설계해야 한다</a:t>
             </a:r>
             <a:r>
-              <a:rPr lang="en-US" altLang="ko-KR" smtClean="0"/>
+              <a:rPr lang="en-US" altLang="ko-KR"/>
               <a:t>.</a:t>
             </a:r>
           </a:p>
           <a:p>
             <a:pPr lvl="1"/>
             <a:r>
-              <a:rPr lang="ko-KR" altLang="en-US" smtClean="0"/>
+              <a:rPr lang="ko-KR" altLang="en-US"/>
               <a:t>예</a:t>
             </a:r>
             <a:r>
-              <a:rPr lang="en-US" altLang="ko-KR" smtClean="0"/>
+              <a:rPr lang="en-US" altLang="ko-KR"/>
               <a:t>) ‘</a:t>
             </a:r>
             <a:r>
-              <a:rPr lang="ko-KR" altLang="en-US" smtClean="0"/>
+              <a:rPr lang="ko-KR" altLang="en-US"/>
               <a:t>파티장</a:t>
             </a:r>
             <a:r>
-              <a:rPr lang="en-US" altLang="ko-KR" smtClean="0"/>
+              <a:rPr lang="en-US" altLang="ko-KR"/>
               <a:t>/</a:t>
             </a:r>
             <a:r>
-              <a:rPr lang="ko-KR" altLang="en-US" smtClean="0"/>
+              <a:rPr lang="ko-KR" altLang="en-US"/>
               <a:t>공대장</a:t>
             </a:r>
             <a:r>
-              <a:rPr lang="en-US" altLang="ko-KR" smtClean="0"/>
+              <a:rPr lang="en-US" altLang="ko-KR"/>
               <a:t>/</a:t>
             </a:r>
             <a:r>
-              <a:rPr lang="ko-KR" altLang="en-US" smtClean="0"/>
+              <a:rPr lang="ko-KR" altLang="en-US"/>
               <a:t>길드장</a:t>
             </a:r>
             <a:r>
-              <a:rPr lang="en-US" altLang="ko-KR" smtClean="0"/>
+              <a:rPr lang="en-US" altLang="ko-KR"/>
               <a:t>’</a:t>
             </a:r>
             <a:r>
-              <a:rPr lang="ko-KR" altLang="en-US" smtClean="0"/>
+              <a:rPr lang="ko-KR" altLang="en-US"/>
               <a:t>으로 몬스터를 킬했니</a:t>
             </a:r>
             <a:r>
-              <a:rPr lang="en-US" altLang="ko-KR" smtClean="0"/>
+              <a:rPr lang="en-US" altLang="ko-KR"/>
               <a:t>?</a:t>
             </a:r>
           </a:p>
           <a:p>
             <a:pPr lvl="1"/>
             <a:r>
-              <a:rPr lang="ko-KR" altLang="en-US" smtClean="0"/>
+              <a:rPr lang="ko-KR" altLang="en-US"/>
               <a:t>우리가 어떤 조건들을 설정하느냐에 따라서 플레이어들 간의 관계가 형성되기도 한다</a:t>
             </a:r>
             <a:r>
-              <a:rPr lang="en-US" altLang="ko-KR" smtClean="0"/>
+              <a:rPr lang="en-US" altLang="ko-KR"/>
               <a:t>.</a:t>
             </a:r>
           </a:p>
@@ -6370,161 +4272,151 @@
           </a:p>
           <a:p>
             <a:r>
-              <a:rPr lang="ko-KR" altLang="en-US" smtClean="0"/>
+              <a:rPr lang="ko-KR" altLang="en-US"/>
               <a:t>아이템을 획득했니</a:t>
             </a:r>
             <a:r>
-              <a:rPr lang="en-US" altLang="ko-KR" smtClean="0"/>
+              <a:rPr lang="en-US" altLang="ko-KR"/>
               <a:t>?</a:t>
             </a:r>
           </a:p>
           <a:p>
             <a:pPr lvl="1"/>
             <a:r>
-              <a:rPr lang="en-US" altLang="ko-KR" smtClean="0"/>
+              <a:rPr lang="en-US" altLang="ko-KR"/>
               <a:t>‘</a:t>
             </a:r>
             <a:r>
-              <a:rPr lang="ko-KR" altLang="en-US" smtClean="0"/>
+              <a:rPr lang="ko-KR" altLang="en-US"/>
               <a:t>누가</a:t>
             </a:r>
             <a:r>
-              <a:rPr lang="en-US" altLang="ko-KR" smtClean="0"/>
+              <a:rPr lang="en-US" altLang="ko-KR"/>
               <a:t>’ </a:t>
             </a:r>
             <a:r>
-              <a:rPr lang="ko-KR" altLang="en-US" smtClean="0"/>
+              <a:rPr lang="ko-KR" altLang="en-US"/>
               <a:t>만든 아이템을 가져와줄래</a:t>
             </a:r>
             <a:r>
-              <a:rPr lang="en-US" altLang="ko-KR" smtClean="0"/>
+              <a:rPr lang="en-US" altLang="ko-KR"/>
               <a:t>? =&gt; </a:t>
             </a:r>
             <a:r>
-              <a:rPr lang="ko-KR" altLang="en-US" smtClean="0"/>
+              <a:rPr lang="ko-KR" altLang="en-US"/>
               <a:t>커뮤니티</a:t>
             </a:r>
             <a:r>
-              <a:rPr lang="en-US" altLang="ko-KR" smtClean="0"/>
+              <a:rPr lang="en-US" altLang="ko-KR"/>
               <a:t>/</a:t>
             </a:r>
             <a:r>
-              <a:rPr lang="ko-KR" altLang="en-US" smtClean="0"/>
+              <a:rPr lang="ko-KR" altLang="en-US"/>
               <a:t>스토리가 된다</a:t>
             </a:r>
             <a:r>
-              <a:rPr lang="en-US" altLang="ko-KR" smtClean="0"/>
+              <a:rPr lang="en-US" altLang="ko-KR"/>
               <a:t>.</a:t>
             </a:r>
           </a:p>
           <a:p>
             <a:pPr lvl="1"/>
             <a:r>
-              <a:rPr lang="ko-KR" altLang="en-US" smtClean="0"/>
+              <a:rPr lang="ko-KR" altLang="en-US"/>
               <a:t>니가 획득한 아이템</a:t>
             </a:r>
             <a:r>
-              <a:rPr lang="en-US" altLang="ko-KR" smtClean="0"/>
+              <a:rPr lang="en-US" altLang="ko-KR"/>
               <a:t>, </a:t>
             </a:r>
             <a:r>
-              <a:rPr lang="ko-KR" altLang="en-US" smtClean="0"/>
+              <a:rPr lang="ko-KR" altLang="en-US"/>
               <a:t>착용도 했니</a:t>
             </a:r>
             <a:r>
-              <a:rPr lang="en-US" altLang="ko-KR" smtClean="0"/>
+              <a:rPr lang="en-US" altLang="ko-KR"/>
               <a:t>? =&gt; </a:t>
             </a:r>
             <a:r>
-              <a:rPr lang="ko-KR" altLang="en-US" smtClean="0"/>
+              <a:rPr lang="ko-KR" altLang="en-US"/>
               <a:t>착용 시 귀속되는 아이템</a:t>
             </a:r>
-            <a:endParaRPr lang="en-US" altLang="ko-KR" smtClean="0"/>
+            <a:endParaRPr lang="en-US" altLang="ko-KR"/>
           </a:p>
           <a:p>
             <a:pPr lvl="2"/>
             <a:r>
-              <a:rPr lang="ko-KR" altLang="en-US" smtClean="0"/>
+              <a:rPr lang="ko-KR" altLang="en-US"/>
               <a:t>경매장에 팔지 말고</a:t>
             </a:r>
             <a:r>
-              <a:rPr lang="en-US" altLang="ko-KR" smtClean="0"/>
+              <a:rPr lang="en-US" altLang="ko-KR"/>
               <a:t>, </a:t>
             </a:r>
             <a:r>
-              <a:rPr lang="ko-KR" altLang="en-US" smtClean="0"/>
+              <a:rPr lang="ko-KR" altLang="en-US"/>
               <a:t>니가 착용해서 사용하라고</a:t>
             </a:r>
             <a:r>
-              <a:rPr lang="en-US" altLang="ko-KR" smtClean="0"/>
+              <a:rPr lang="en-US" altLang="ko-KR"/>
               <a:t>.</a:t>
             </a:r>
+          </a:p>
+          <a:p>
+            <a:pPr lvl="1"/>
+            <a:r>
+              <a:rPr lang="en-US" altLang="ko-KR"/>
+              <a:t>4</a:t>
+            </a:r>
+            <a:r>
+              <a:rPr lang="ko-KR" altLang="en-US"/>
+              <a:t>단계 때 강화 실패 시 부서질 수도 있는 아이템</a:t>
+            </a:r>
+            <a:br>
+              <a:rPr lang="en-US" altLang="ko-KR"/>
+            </a:br>
+            <a:r>
+              <a:rPr lang="en-US" altLang="ko-KR"/>
+              <a:t>=&gt; 5</a:t>
+            </a:r>
+            <a:r>
+              <a:rPr lang="ko-KR" altLang="en-US"/>
+              <a:t>단계까지 강화해오라는 퀘스트 설계</a:t>
+            </a:r>
+            <a:br>
+              <a:rPr lang="en-US" altLang="ko-KR"/>
+            </a:br>
+            <a:r>
+              <a:rPr lang="en-US" altLang="ko-KR"/>
+              <a:t>=&gt; </a:t>
+            </a:r>
+            <a:r>
+              <a:rPr lang="ko-KR" altLang="en-US"/>
+              <a:t>강화 확률 올려주는 아이템</a:t>
+            </a:r>
+            <a:r>
+              <a:rPr lang="en-US" altLang="ko-KR"/>
+              <a:t>, </a:t>
+            </a:r>
+            <a:r>
+              <a:rPr lang="ko-KR" altLang="en-US"/>
+              <a:t>실패를 한 번 막아주는 아이템을 상점에 팔면</a:t>
+            </a:r>
+            <a:r>
+              <a:rPr lang="en-US" altLang="ko-KR"/>
+              <a:t>, </a:t>
+            </a:r>
+            <a:r>
+              <a:rPr lang="ko-KR" altLang="en-US"/>
+              <a:t>고객들은 돈을 쓰게 된다</a:t>
+            </a:r>
+            <a:r>
+              <a:rPr lang="en-US" altLang="ko-KR"/>
+              <a:t>.</a:t>
+            </a:r>
+          </a:p>
+          <a:p>
             <a:endParaRPr lang="en-US" altLang="ko-KR"/>
-          </a:p>
-          <a:p>
-            <a:pPr lvl="1"/>
-            <a:r>
-              <a:rPr lang="en-US" altLang="ko-KR" smtClean="0"/>
-              <a:t>4</a:t>
-            </a:r>
-            <a:r>
-              <a:rPr lang="ko-KR" altLang="en-US" smtClean="0"/>
-              <a:t>단계 때 강화 실패 시 부서질 수도 있는 아이템</a:t>
-            </a:r>
-            <a:r>
-              <a:rPr lang="en-US" altLang="ko-KR" smtClean="0"/>
-              <a:t/>
-            </a:r>
-            <a:br>
-              <a:rPr lang="en-US" altLang="ko-KR" smtClean="0"/>
-            </a:br>
-            <a:r>
-              <a:rPr lang="en-US" altLang="ko-KR" smtClean="0"/>
-              <a:t>=&gt; 5</a:t>
-            </a:r>
-            <a:r>
-              <a:rPr lang="ko-KR" altLang="en-US" smtClean="0"/>
-              <a:t>단계까지 강화해오라는 퀘스트 설계</a:t>
-            </a:r>
-            <a:r>
-              <a:rPr lang="en-US" altLang="ko-KR" smtClean="0"/>
-              <a:t/>
-            </a:r>
-            <a:br>
-              <a:rPr lang="en-US" altLang="ko-KR" smtClean="0"/>
-            </a:br>
-            <a:r>
-              <a:rPr lang="en-US" altLang="ko-KR" smtClean="0"/>
-              <a:t>=&gt; </a:t>
-            </a:r>
-            <a:r>
-              <a:rPr lang="ko-KR" altLang="en-US" smtClean="0"/>
-              <a:t>강화 확률 올려주는 아이템</a:t>
-            </a:r>
-            <a:r>
-              <a:rPr lang="en-US" altLang="ko-KR" smtClean="0"/>
-              <a:t>, </a:t>
-            </a:r>
-            <a:r>
-              <a:rPr lang="ko-KR" altLang="en-US" smtClean="0"/>
-              <a:t>실패를 한 번 막아주는 아이템을 상점에 팔면</a:t>
-            </a:r>
-            <a:r>
-              <a:rPr lang="en-US" altLang="ko-KR" smtClean="0"/>
-              <a:t>, </a:t>
-            </a:r>
-            <a:r>
-              <a:rPr lang="ko-KR" altLang="en-US" smtClean="0"/>
-              <a:t>고객들은 돈을 쓰게 된다</a:t>
-            </a:r>
-            <a:r>
-              <a:rPr lang="en-US" altLang="ko-KR" smtClean="0"/>
-              <a:t>.</a:t>
-            </a:r>
-            <a:endParaRPr lang="en-US" altLang="ko-KR"/>
-          </a:p>
-          <a:p>
-            <a:endParaRPr lang="en-US" altLang="ko-KR" smtClean="0"/>
           </a:p>
           <a:p>
             <a:endParaRPr lang="ko-KR" altLang="en-US"/>
@@ -6577,10 +4469,9 @@
           <a:lstStyle/>
           <a:p>
             <a:r>
-              <a:rPr lang="ko-KR" altLang="en-US" smtClean="0"/>
+              <a:rPr lang="ko-KR" altLang="en-US"/>
               <a:t>완료조건</a:t>
             </a:r>
-            <a:endParaRPr lang="ko-KR" altLang="en-US"/>
           </a:p>
         </p:txBody>
       </p:sp>
@@ -6607,113 +4498,113 @@
           <a:lstStyle/>
           <a:p>
             <a:r>
-              <a:rPr lang="ko-KR" altLang="en-US" smtClean="0"/>
+              <a:rPr lang="ko-KR" altLang="en-US"/>
               <a:t>위치 정보 만족</a:t>
             </a:r>
-            <a:endParaRPr lang="en-US" altLang="ko-KR" smtClean="0"/>
+            <a:endParaRPr lang="en-US" altLang="ko-KR"/>
           </a:p>
           <a:p>
             <a:pPr lvl="1"/>
             <a:r>
-              <a:rPr lang="en-US" altLang="ko-KR" smtClean="0"/>
+              <a:rPr lang="en-US" altLang="ko-KR"/>
               <a:t>Player Character</a:t>
             </a:r>
             <a:r>
-              <a:rPr lang="ko-KR" altLang="en-US" smtClean="0"/>
+              <a:rPr lang="ko-KR" altLang="en-US"/>
               <a:t>뿐만 아니라 </a:t>
             </a:r>
             <a:r>
-              <a:rPr lang="en-US" altLang="ko-KR" smtClean="0"/>
+              <a:rPr lang="en-US" altLang="ko-KR"/>
               <a:t>NPC, Monster, Event Object</a:t>
             </a:r>
             <a:r>
-              <a:rPr lang="ko-KR" altLang="en-US" smtClean="0"/>
+              <a:rPr lang="ko-KR" altLang="en-US"/>
               <a:t>의 위치까지 활용할 수 있다</a:t>
             </a:r>
             <a:r>
-              <a:rPr lang="en-US" altLang="ko-KR" smtClean="0"/>
+              <a:rPr lang="en-US" altLang="ko-KR"/>
               <a:t>.</a:t>
             </a:r>
           </a:p>
           <a:p>
             <a:pPr lvl="2"/>
             <a:r>
-              <a:rPr lang="ko-KR" altLang="en-US" smtClean="0"/>
+              <a:rPr lang="ko-KR" altLang="en-US"/>
               <a:t>예</a:t>
             </a:r>
             <a:r>
-              <a:rPr lang="en-US" altLang="ko-KR" smtClean="0"/>
+              <a:rPr lang="en-US" altLang="ko-KR"/>
               <a:t>) PC</a:t>
             </a:r>
             <a:r>
-              <a:rPr lang="ko-KR" altLang="en-US" smtClean="0"/>
+              <a:rPr lang="ko-KR" altLang="en-US"/>
               <a:t>가 먼저 함정 위치를 지나가고</a:t>
             </a:r>
             <a:r>
-              <a:rPr lang="en-US" altLang="ko-KR" smtClean="0"/>
+              <a:rPr lang="en-US" altLang="ko-KR"/>
               <a:t>, </a:t>
             </a:r>
             <a:r>
-              <a:rPr lang="ko-KR" altLang="en-US" smtClean="0"/>
+              <a:rPr lang="ko-KR" altLang="en-US"/>
               <a:t>그 다음에 몬스터가 함정 위치에 오면 함정 발동</a:t>
             </a:r>
             <a:endParaRPr lang="en-US" altLang="ko-KR"/>
           </a:p>
           <a:p>
-            <a:endParaRPr lang="en-US" altLang="ko-KR" smtClean="0"/>
-          </a:p>
-          <a:p>
-            <a:r>
-              <a:rPr lang="ko-KR" altLang="en-US" smtClean="0"/>
+            <a:endParaRPr lang="en-US" altLang="ko-KR"/>
+          </a:p>
+          <a:p>
+            <a:r>
+              <a:rPr lang="ko-KR" altLang="en-US"/>
               <a:t>스킬</a:t>
             </a:r>
             <a:r>
-              <a:rPr lang="en-US" altLang="ko-KR" smtClean="0"/>
+              <a:rPr lang="en-US" altLang="ko-KR"/>
               <a:t> </a:t>
             </a:r>
             <a:r>
-              <a:rPr lang="ko-KR" altLang="en-US" smtClean="0"/>
+              <a:rPr lang="ko-KR" altLang="en-US"/>
               <a:t>사용정보 만족</a:t>
             </a:r>
-            <a:endParaRPr lang="en-US" altLang="ko-KR" smtClean="0"/>
+            <a:endParaRPr lang="en-US" altLang="ko-KR"/>
           </a:p>
           <a:p>
             <a:pPr lvl="1"/>
             <a:r>
-              <a:rPr lang="ko-KR" altLang="en-US" smtClean="0"/>
+              <a:rPr lang="ko-KR" altLang="en-US"/>
               <a:t>대상의 스킬 등의 버프 등의 부여 상태</a:t>
             </a:r>
             <a:endParaRPr lang="en-US" altLang="ko-KR"/>
           </a:p>
           <a:p>
-            <a:endParaRPr lang="en-US" altLang="ko-KR" smtClean="0"/>
-          </a:p>
-          <a:p>
-            <a:r>
-              <a:rPr lang="ko-KR" altLang="en-US" smtClean="0"/>
+            <a:endParaRPr lang="en-US" altLang="ko-KR"/>
+          </a:p>
+          <a:p>
+            <a:r>
+              <a:rPr lang="ko-KR" altLang="en-US"/>
               <a:t>기능 사용</a:t>
             </a:r>
-            <a:endParaRPr lang="en-US" altLang="ko-KR" smtClean="0"/>
+            <a:endParaRPr lang="en-US" altLang="ko-KR"/>
           </a:p>
           <a:p>
             <a:pPr lvl="1"/>
             <a:r>
-              <a:rPr lang="ko-KR" altLang="en-US" smtClean="0"/>
+              <a:rPr lang="ko-KR" altLang="en-US"/>
               <a:t>그냥 공격이나 스킬을 사용해서 몬스터를 잡을 수도 있지만</a:t>
             </a:r>
             <a:r>
-              <a:rPr lang="en-US" altLang="ko-KR" smtClean="0"/>
+              <a:rPr lang="en-US" altLang="ko-KR"/>
               <a:t>,</a:t>
             </a:r>
             <a:br>
-              <a:rPr lang="en-US" altLang="ko-KR" smtClean="0"/>
+              <a:rPr lang="en-US" altLang="ko-KR"/>
             </a:br>
             <a:r>
-              <a:rPr lang="ko-KR" altLang="en-US" smtClean="0"/>
+              <a:rPr lang="ko-KR" altLang="en-US"/>
               <a:t>트리거를 통해서 몬스터를 잡을 수도 있다</a:t>
             </a:r>
             <a:r>
-              <a:rPr lang="en-US" altLang="ko-KR" smtClean="0"/>
+              <a:rPr lang="en-US" altLang="ko-KR"/>
               <a:t>.</a:t>
             </a:r>
             <a:endParaRPr lang="ko-KR" altLang="en-US"/>
@@ -6766,10 +4657,9 @@
           <a:lstStyle/>
           <a:p>
             <a:r>
-              <a:rPr lang="ko-KR" altLang="en-US" smtClean="0"/>
+              <a:rPr lang="ko-KR" altLang="en-US"/>
               <a:t>완료보상조건</a:t>
             </a:r>
-            <a:endParaRPr lang="ko-KR" altLang="en-US"/>
           </a:p>
         </p:txBody>
       </p:sp>
@@ -6796,118 +4686,110 @@
           <a:lstStyle/>
           <a:p>
             <a:r>
-              <a:rPr lang="ko-KR" altLang="en-US" smtClean="0"/>
+              <a:rPr lang="ko-KR" altLang="en-US"/>
               <a:t>퀘스트 </a:t>
             </a:r>
             <a:r>
-              <a:rPr lang="en-US" altLang="ko-KR" smtClean="0"/>
+              <a:rPr lang="en-US" altLang="ko-KR"/>
               <a:t>‘</a:t>
             </a:r>
             <a:r>
-              <a:rPr lang="ko-KR" altLang="en-US" smtClean="0"/>
+              <a:rPr lang="ko-KR" altLang="en-US"/>
               <a:t>완료조건</a:t>
             </a:r>
             <a:r>
-              <a:rPr lang="en-US" altLang="ko-KR" smtClean="0"/>
+              <a:rPr lang="en-US" altLang="ko-KR"/>
               <a:t>’</a:t>
             </a:r>
             <a:r>
-              <a:rPr lang="ko-KR" altLang="en-US" smtClean="0"/>
+              <a:rPr lang="ko-KR" altLang="en-US"/>
               <a:t>을 달성하고 나면</a:t>
             </a:r>
             <a:r>
-              <a:rPr lang="en-US" altLang="ko-KR" smtClean="0"/>
+              <a:rPr lang="en-US" altLang="ko-KR"/>
               <a:t>,</a:t>
             </a:r>
             <a:br>
-              <a:rPr lang="en-US" altLang="ko-KR" smtClean="0"/>
+              <a:rPr lang="en-US" altLang="ko-KR"/>
             </a:br>
             <a:r>
-              <a:rPr lang="ko-KR" altLang="en-US" smtClean="0"/>
+              <a:rPr lang="ko-KR" altLang="en-US"/>
               <a:t>그 퀘스트에 대한 기록에 </a:t>
             </a:r>
             <a:r>
-              <a:rPr lang="en-US" altLang="ko-KR" smtClean="0"/>
+              <a:rPr lang="en-US" altLang="ko-KR"/>
               <a:t>‘On’</a:t>
             </a:r>
             <a:r>
-              <a:rPr lang="ko-KR" altLang="en-US" smtClean="0"/>
+              <a:rPr lang="ko-KR" altLang="en-US"/>
               <a:t>을 기록하게 된다</a:t>
             </a:r>
             <a:r>
-              <a:rPr lang="en-US" altLang="ko-KR" smtClean="0"/>
+              <a:rPr lang="en-US" altLang="ko-KR"/>
               <a:t>.</a:t>
             </a:r>
           </a:p>
           <a:p>
             <a:r>
-              <a:rPr lang="ko-KR" altLang="en-US" smtClean="0"/>
+              <a:rPr lang="ko-KR" altLang="en-US"/>
               <a:t>대부분의 퀘스트는 </a:t>
             </a:r>
             <a:r>
-              <a:rPr lang="en-US" altLang="ko-KR" smtClean="0"/>
+              <a:rPr lang="en-US" altLang="ko-KR"/>
               <a:t>1</a:t>
             </a:r>
             <a:r>
-              <a:rPr lang="ko-KR" altLang="en-US" smtClean="0"/>
+              <a:rPr lang="ko-KR" altLang="en-US"/>
               <a:t>회성이기 때문에</a:t>
             </a:r>
-            <a:r>
-              <a:rPr lang="en-US" altLang="ko-KR" smtClean="0"/>
-              <a:t/>
-            </a:r>
             <a:br>
-              <a:rPr lang="en-US" altLang="ko-KR" smtClean="0"/>
+              <a:rPr lang="en-US" altLang="ko-KR"/>
             </a:br>
             <a:r>
-              <a:rPr lang="ko-KR" altLang="en-US" smtClean="0"/>
+              <a:rPr lang="ko-KR" altLang="en-US"/>
               <a:t>한 번 </a:t>
             </a:r>
             <a:r>
-              <a:rPr lang="en-US" altLang="ko-KR" smtClean="0"/>
+              <a:rPr lang="en-US" altLang="ko-KR"/>
               <a:t>On</a:t>
             </a:r>
             <a:r>
-              <a:rPr lang="ko-KR" altLang="en-US" smtClean="0"/>
+              <a:rPr lang="ko-KR" altLang="en-US"/>
               <a:t>으로 기록된 퀘스트는</a:t>
             </a:r>
-            <a:r>
-              <a:rPr lang="en-US" altLang="ko-KR" smtClean="0"/>
-              <a:t/>
-            </a:r>
             <a:br>
-              <a:rPr lang="en-US" altLang="ko-KR" smtClean="0"/>
+              <a:rPr lang="en-US" altLang="ko-KR"/>
             </a:br>
             <a:r>
-              <a:rPr lang="ko-KR" altLang="en-US" smtClean="0"/>
+              <a:rPr lang="ko-KR" altLang="en-US"/>
               <a:t>다시는 할 수 없게 된다</a:t>
             </a:r>
             <a:r>
-              <a:rPr lang="en-US" altLang="ko-KR" smtClean="0"/>
+              <a:rPr lang="en-US" altLang="ko-KR"/>
               <a:t>.</a:t>
             </a:r>
           </a:p>
           <a:p>
             <a:r>
-              <a:rPr lang="ko-KR" altLang="en-US" smtClean="0"/>
+              <a:rPr lang="ko-KR" altLang="en-US"/>
               <a:t>이런 식으로 퀘스트를 관리할 수 있다</a:t>
             </a:r>
             <a:r>
-              <a:rPr lang="en-US" altLang="ko-KR" smtClean="0"/>
+              <a:rPr lang="en-US" altLang="ko-KR"/>
               <a:t>.</a:t>
             </a:r>
           </a:p>
           <a:p>
             <a:r>
-              <a:rPr lang="en-US" altLang="ko-KR" smtClean="0"/>
+              <a:rPr lang="en-US" altLang="ko-KR"/>
               <a:t>On</a:t>
             </a:r>
             <a:r>
-              <a:rPr lang="ko-KR" altLang="en-US" smtClean="0"/>
+              <a:rPr lang="ko-KR" altLang="en-US"/>
               <a:t>으로 기록된 퀘스트에 대해 보상을 지급하게 할 수 있다</a:t>
             </a:r>
             <a:r>
-              <a:rPr lang="en-US" altLang="ko-KR" smtClean="0"/>
+              <a:rPr lang="en-US" altLang="ko-KR"/>
               <a:t>.</a:t>
             </a:r>
           </a:p>
